--- a/papers/Презентация_защита.pptx
+++ b/papers/Презентация_защита.pptx
@@ -19,8 +19,9 @@
     <p:sldId id="264" r:id="rId12"/>
     <p:sldId id="265" r:id="rId13"/>
     <p:sldId id="266" r:id="rId14"/>
-    <p:sldId id="267" r:id="rId15"/>
-    <p:sldId id="268" r:id="rId16"/>
+    <p:sldId id="269" r:id="rId15"/>
+    <p:sldId id="267" r:id="rId16"/>
+    <p:sldId id="268" r:id="rId17"/>
   </p:sldIdLst>
   <p:sldSz cx="9144000" cy="5143500"/>
   <p:notesSz cx="5143500" cy="9144000"/>
@@ -2137,6 +2138,10 @@
             <a:srgbClr val="0F2A4A"/>
           </a:solidFill>
         </p:spPr>
+        <p:txBody>
+          <a:bodyPr/>
+          <a:p/>
+        </p:txBody>
       </p:sp>
       <p:sp>
         <p:nvSpPr>
@@ -2578,7 +2583,7 @@
                 <a:ea typeface="Calibri" pitchFamily="34" charset="-122"/>
                 <a:cs typeface="Calibri" pitchFamily="34" charset="-120"/>
               </a:rPr>
-              <a:t>10 / 13</a:t>
+              <a:t>10 / 14</a:t>
             </a:r>
             <a:endParaRPr lang="en-US" sz="900" dirty="0"/>
           </a:p>
@@ -2619,7 +2624,7 @@
       </p:grpSpPr>
       <p:sp>
         <p:nvSpPr>
-          <p:cNvPr id="2" name="Shape 0"/>
+          <p:cNvPr id="2" name="Rectangle 1"/>
           <p:cNvSpPr/>
           <p:nvPr/>
         </p:nvSpPr>
@@ -2634,12 +2639,36 @@
           <a:solidFill>
             <a:srgbClr val="0F2A4A"/>
           </a:solidFill>
-        </p:spPr>
-      </p:sp>
-      <p:sp>
-        <p:nvSpPr>
-          <p:cNvPr id="3" name="Text 1"/>
-          <p:cNvSpPr/>
+          <a:ln w="0">
+            <a:noFill/>
+          </a:ln>
+        </p:spPr>
+        <p:style>
+          <a:lnRef idx="1">
+            <a:schemeClr val="accent1"/>
+          </a:lnRef>
+          <a:fillRef idx="3">
+            <a:schemeClr val="accent1"/>
+          </a:fillRef>
+          <a:effectRef idx="2">
+            <a:schemeClr val="accent1"/>
+          </a:effectRef>
+          <a:fontRef idx="minor">
+            <a:schemeClr val="lt1"/>
+          </a:fontRef>
+        </p:style>
+        <p:txBody>
+          <a:bodyPr rtlCol="0" anchor="ctr"/>
+          <a:lstStyle/>
+          <a:p>
+            <a:pPr algn="ctr"/>
+          </a:p>
+        </p:txBody>
+      </p:sp>
+      <p:sp>
+        <p:nvSpPr>
+          <p:cNvPr id="3" name="TextBox 2"/>
+          <p:cNvSpPr txBox="1"/>
           <p:nvPr/>
         </p:nvSpPr>
         <p:spPr>
@@ -2653,31 +2682,32 @@
           <a:noFill/>
         </p:spPr>
         <p:txBody>
-          <a:bodyPr wrap="square" lIns="0" tIns="0" rIns="0" bIns="0" rtlCol="0" anchor="ctr"/>
-          <a:lstStyle/>
-          <a:p>
-            <a:pPr marL="0" indent="0">
-              <a:buNone/>
-            </a:pPr>
-            <a:r>
-              <a:rPr lang="en-US" sz="2200" b="1" dirty="0">
+          <a:bodyPr wrap="none">
+            <a:spAutoFit/>
+          </a:bodyPr>
+          <a:lstStyle/>
+          <a:p>
+            <a:pPr algn="l"/>
+            <a:r>
+              <a:rPr sz="2200" b="1">
                 <a:solidFill>
                   <a:srgbClr val="FFFFFF"/>
                 </a:solidFill>
-                <a:latin typeface="Calibri" pitchFamily="34" charset="0"/>
-                <a:ea typeface="Calibri" pitchFamily="34" charset="-122"/>
-                <a:cs typeface="Calibri" pitchFamily="34" charset="-120"/>
-              </a:rPr>
-              <a:t>Оценка работоспособности</a:t>
-            </a:r>
-            <a:endParaRPr lang="en-US" sz="2200" dirty="0"/>
-          </a:p>
-        </p:txBody>
-      </p:sp>
-      <p:sp>
-        <p:nvSpPr>
-          <p:cNvPr id="4" name="Text 2"/>
-          <p:cNvSpPr/>
+              </a:rPr>
+              <a:t>Методика оценки</a:t>
+            </a:r>
+            <a:endParaRPr sz="2200" b="1">
+              <a:solidFill>
+                <a:srgbClr val="FFFFFF"/>
+              </a:solidFill>
+            </a:endParaRPr>
+          </a:p>
+        </p:txBody>
+      </p:sp>
+      <p:sp>
+        <p:nvSpPr>
+          <p:cNvPr id="4" name="TextBox 3"/>
+          <p:cNvSpPr txBox="1"/>
           <p:nvPr/>
         </p:nvSpPr>
         <p:spPr>
@@ -2691,113 +2721,116 @@
           <a:noFill/>
         </p:spPr>
         <p:txBody>
-          <a:bodyPr wrap="square" lIns="0" tIns="0" rIns="0" bIns="0" rtlCol="0" anchor="ctr"/>
-          <a:lstStyle/>
-          <a:p>
-            <a:pPr marL="0" indent="0" algn="r">
-              <a:buNone/>
-            </a:pPr>
-            <a:r>
-              <a:rPr lang="en-US" sz="1200" dirty="0">
+          <a:bodyPr wrap="none">
+            <a:spAutoFit/>
+          </a:bodyPr>
+          <a:lstStyle/>
+          <a:p>
+            <a:pPr algn="r"/>
+            <a:r>
+              <a:rPr sz="1200" b="0">
                 <a:solidFill>
                   <a:srgbClr val="00B4A6"/>
                 </a:solidFill>
-                <a:latin typeface="Calibri" pitchFamily="34" charset="0"/>
-                <a:ea typeface="Calibri" pitchFamily="34" charset="-122"/>
-                <a:cs typeface="Calibri" pitchFamily="34" charset="-120"/>
               </a:rPr>
               <a:t>11</a:t>
             </a:r>
-            <a:endParaRPr lang="en-US" sz="1200" dirty="0"/>
-          </a:p>
-        </p:txBody>
-      </p:sp>
-      <p:sp>
-        <p:nvSpPr>
-          <p:cNvPr id="5" name="Text 3"/>
-          <p:cNvSpPr/>
-          <p:nvPr/>
-        </p:nvSpPr>
-        <p:spPr>
-          <a:xfrm>
-            <a:off x="365760" y="685800"/>
-            <a:ext cx="8412480" cy="320040"/>
-          </a:xfrm>
-          <a:prstGeom prst="rect">
-            <a:avLst/>
-          </a:prstGeom>
-          <a:noFill/>
-        </p:spPr>
-        <p:txBody>
-          <a:bodyPr wrap="square" lIns="0" tIns="0" rIns="0" bIns="0" rtlCol="0" anchor="ctr"/>
-          <a:lstStyle/>
-          <a:p>
-            <a:pPr marL="0" indent="0">
-              <a:buNone/>
-            </a:pPr>
-            <a:r>
-              <a:rPr lang="en-US" sz="1400" b="1" dirty="0">
-                <a:solidFill>
-                  <a:srgbClr val="0F2A4A"/>
-                </a:solidFill>
-                <a:latin typeface="Calibri" pitchFamily="34" charset="0"/>
-                <a:ea typeface="Calibri" pitchFamily="34" charset="-122"/>
-                <a:cs typeface="Calibri" pitchFamily="34" charset="-120"/>
-              </a:rPr>
-              <a:t>Методика</a:t>
-            </a:r>
-            <a:endParaRPr lang="en-US" sz="1400" dirty="0"/>
-          </a:p>
-        </p:txBody>
-      </p:sp>
-      <p:sp>
-        <p:nvSpPr>
-          <p:cNvPr id="6" name="Text 4"/>
-          <p:cNvSpPr/>
-          <p:nvPr/>
-        </p:nvSpPr>
-        <p:spPr>
-          <a:xfrm>
-            <a:off x="365760" y="1005840"/>
-            <a:ext cx="8412480" cy="548640"/>
-          </a:xfrm>
-          <a:prstGeom prst="rect">
-            <a:avLst/>
-          </a:prstGeom>
-          <a:noFill/>
-        </p:spPr>
-        <p:txBody>
-          <a:bodyPr wrap="square" lIns="0" tIns="0" rIns="0" bIns="0" rtlCol="0" anchor="ctr"/>
-          <a:lstStyle/>
-          <a:p>
-            <a:pPr marL="0" indent="0">
-              <a:buNone/>
-            </a:pPr>
-            <a:r>
-              <a:rPr lang="en-US" sz="1100" dirty="0">
-                <a:solidFill>
-                  <a:srgbClr val="1F2937"/>
-                </a:solidFill>
-                <a:latin typeface="Calibri" pitchFamily="34" charset="0"/>
-                <a:ea typeface="Calibri" pitchFamily="34" charset="-122"/>
-                <a:cs typeface="Calibri" pitchFamily="34" charset="-120"/>
-              </a:rPr>
-              <a:t>50 тестовых вопросов по 35 документам корпуса FinBridge; для каждого вопроса — эталонный документ. Качество: recall@10, экспертная точность, доля корректных ссылок, галлюцинации. Производительность: усреднение по серии прогонов на CPU.</a:t>
-            </a:r>
-            <a:endParaRPr lang="en-US" sz="1100" dirty="0"/>
-          </a:p>
-        </p:txBody>
-      </p:sp>
-      <p:sp>
-        <p:nvSpPr>
-          <p:cNvPr id="7" name="Shape 5"/>
-          <p:cNvSpPr/>
-          <p:nvPr/>
-        </p:nvSpPr>
-        <p:spPr>
-          <a:xfrm>
-            <a:off x="365760" y="1668780"/>
-            <a:ext cx="1965960" cy="1143000"/>
+            <a:endParaRPr sz="1200" b="0">
+              <a:solidFill>
+                <a:srgbClr val="00B4A6"/>
+              </a:solidFill>
+            </a:endParaRPr>
+          </a:p>
+        </p:txBody>
+      </p:sp>
+      <p:sp>
+        <p:nvSpPr>
+          <p:cNvPr id="5" name="TextBox 4"/>
+          <p:cNvSpPr txBox="1"/>
+          <p:nvPr/>
+        </p:nvSpPr>
+        <p:spPr>
+          <a:xfrm>
+            <a:off x="365760" y="4892040"/>
+            <a:ext cx="6400800" cy="228600"/>
+          </a:xfrm>
+          <a:prstGeom prst="rect">
+            <a:avLst/>
+          </a:prstGeom>
+          <a:noFill/>
+        </p:spPr>
+        <p:txBody>
+          <a:bodyPr wrap="none">
+            <a:spAutoFit/>
+          </a:bodyPr>
+          <a:lstStyle/>
+          <a:p>
+            <a:pPr algn="l"/>
+            <a:r>
+              <a:rPr sz="900" b="0">
+                <a:solidFill>
+                  <a:srgbClr val="6B7280"/>
+                </a:solidFill>
+              </a:rPr>
+              <a:t>Атрошенко Б. С.  •  ВКР  •  ЯрГУ, 2026</a:t>
+            </a:r>
+            <a:endParaRPr sz="900" b="0">
+              <a:solidFill>
+                <a:srgbClr val="6B7280"/>
+              </a:solidFill>
+            </a:endParaRPr>
+          </a:p>
+        </p:txBody>
+      </p:sp>
+      <p:sp>
+        <p:nvSpPr>
+          <p:cNvPr id="6" name="TextBox 5"/>
+          <p:cNvSpPr txBox="1"/>
+          <p:nvPr/>
+        </p:nvSpPr>
+        <p:spPr>
+          <a:xfrm>
+            <a:off x="7863840" y="4892040"/>
+            <a:ext cx="914400" cy="228600"/>
+          </a:xfrm>
+          <a:prstGeom prst="rect">
+            <a:avLst/>
+          </a:prstGeom>
+          <a:noFill/>
+        </p:spPr>
+        <p:txBody>
+          <a:bodyPr wrap="none">
+            <a:spAutoFit/>
+          </a:bodyPr>
+          <a:lstStyle/>
+          <a:p>
+            <a:pPr algn="r"/>
+            <a:r>
+              <a:rPr sz="900" b="0">
+                <a:solidFill>
+                  <a:srgbClr val="6B7280"/>
+                </a:solidFill>
+              </a:rPr>
+              <a:t>11 / 14</a:t>
+            </a:r>
+            <a:endParaRPr sz="900" b="0">
+              <a:solidFill>
+                <a:srgbClr val="6B7280"/>
+              </a:solidFill>
+            </a:endParaRPr>
+          </a:p>
+        </p:txBody>
+      </p:sp>
+      <p:sp>
+        <p:nvSpPr>
+          <p:cNvPr id="7" name="Rectangle 6"/>
+          <p:cNvSpPr/>
+          <p:nvPr/>
+        </p:nvSpPr>
+        <p:spPr>
+          <a:xfrm>
+            <a:off x="365760" y="868680"/>
+            <a:ext cx="4114800" cy="3749040"/>
           </a:xfrm>
           <a:prstGeom prst="rect">
             <a:avLst/>
@@ -2805,31 +2838,42 @@
           <a:solidFill>
             <a:srgbClr val="FFFFFF"/>
           </a:solidFill>
-          <a:ln w="12700">
-            <a:solidFill>
-              <a:srgbClr val="E5E7EB"/>
-            </a:solidFill>
-            <a:prstDash val="solid"/>
+          <a:ln w="0">
+            <a:noFill/>
           </a:ln>
-          <a:effectLst>
-            <a:outerShdw blurRad="101600" dist="25400" dir="5400000" algn="bl" rotWithShape="0">
-              <a:srgbClr val="000000">
-                <a:alpha val="6000"/>
-              </a:srgbClr>
-            </a:outerShdw>
-          </a:effectLst>
-        </p:spPr>
-      </p:sp>
-      <p:sp>
-        <p:nvSpPr>
-          <p:cNvPr id="8" name="Shape 6"/>
-          <p:cNvSpPr/>
-          <p:nvPr/>
-        </p:nvSpPr>
-        <p:spPr>
-          <a:xfrm>
-            <a:off x="365760" y="1645920"/>
-            <a:ext cx="1965960" cy="109728"/>
+        </p:spPr>
+        <p:style>
+          <a:lnRef idx="1">
+            <a:schemeClr val="accent1"/>
+          </a:lnRef>
+          <a:fillRef idx="3">
+            <a:schemeClr val="accent1"/>
+          </a:fillRef>
+          <a:effectRef idx="2">
+            <a:schemeClr val="accent1"/>
+          </a:effectRef>
+          <a:fontRef idx="minor">
+            <a:schemeClr val="lt1"/>
+          </a:fontRef>
+        </p:style>
+        <p:txBody>
+          <a:bodyPr rtlCol="0" anchor="ctr"/>
+          <a:lstStyle/>
+          <a:p>
+            <a:pPr algn="ctr"/>
+          </a:p>
+        </p:txBody>
+      </p:sp>
+      <p:sp>
+        <p:nvSpPr>
+          <p:cNvPr id="8" name="Rectangle 7"/>
+          <p:cNvSpPr/>
+          <p:nvPr/>
+        </p:nvSpPr>
+        <p:spPr>
+          <a:xfrm>
+            <a:off x="365760" y="868680"/>
+            <a:ext cx="4114800" cy="365760"/>
           </a:xfrm>
           <a:prstGeom prst="rect">
             <a:avLst/>
@@ -2837,103 +2881,380 @@
           <a:solidFill>
             <a:srgbClr val="00B4A6"/>
           </a:solidFill>
-        </p:spPr>
-      </p:sp>
-      <p:sp>
-        <p:nvSpPr>
-          <p:cNvPr id="9" name="Text 7"/>
-          <p:cNvSpPr/>
-          <p:nvPr/>
-        </p:nvSpPr>
-        <p:spPr>
-          <a:xfrm>
-            <a:off x="365760" y="1828800"/>
-            <a:ext cx="1965960" cy="548640"/>
-          </a:xfrm>
-          <a:prstGeom prst="rect">
-            <a:avLst/>
-          </a:prstGeom>
-          <a:noFill/>
-        </p:spPr>
-        <p:txBody>
-          <a:bodyPr wrap="square" lIns="0" tIns="0" rIns="0" bIns="0" rtlCol="0" anchor="ctr"/>
-          <a:lstStyle/>
-          <a:p>
-            <a:pPr marL="0" indent="0" algn="ctr">
-              <a:buNone/>
-            </a:pPr>
-            <a:r>
-              <a:rPr lang="en-US" sz="2800" b="1" dirty="0">
+          <a:ln w="0">
+            <a:noFill/>
+          </a:ln>
+        </p:spPr>
+        <p:style>
+          <a:lnRef idx="1">
+            <a:schemeClr val="accent1"/>
+          </a:lnRef>
+          <a:fillRef idx="3">
+            <a:schemeClr val="accent1"/>
+          </a:fillRef>
+          <a:effectRef idx="2">
+            <a:schemeClr val="accent1"/>
+          </a:effectRef>
+          <a:fontRef idx="minor">
+            <a:schemeClr val="lt1"/>
+          </a:fontRef>
+        </p:style>
+        <p:txBody>
+          <a:bodyPr rtlCol="0" anchor="ctr"/>
+          <a:lstStyle/>
+          <a:p>
+            <a:pPr algn="ctr"/>
+          </a:p>
+        </p:txBody>
+      </p:sp>
+      <p:sp>
+        <p:nvSpPr>
+          <p:cNvPr id="9" name="TextBox 8"/>
+          <p:cNvSpPr txBox="1"/>
+          <p:nvPr/>
+        </p:nvSpPr>
+        <p:spPr>
+          <a:xfrm>
+            <a:off x="502920" y="868680"/>
+            <a:ext cx="3977640" cy="365760"/>
+          </a:xfrm>
+          <a:prstGeom prst="rect">
+            <a:avLst/>
+          </a:prstGeom>
+          <a:noFill/>
+        </p:spPr>
+        <p:txBody>
+          <a:bodyPr wrap="none">
+            <a:spAutoFit/>
+          </a:bodyPr>
+          <a:lstStyle/>
+          <a:p>
+            <a:pPr algn="l"/>
+            <a:r>
+              <a:rPr sz="1400" b="1">
+                <a:solidFill>
+                  <a:srgbClr val="FFFFFF"/>
+                </a:solidFill>
+              </a:rPr>
+              <a:t>Датасет и платформа</a:t>
+            </a:r>
+            <a:endParaRPr sz="1400" b="1">
+              <a:solidFill>
+                <a:srgbClr val="FFFFFF"/>
+              </a:solidFill>
+            </a:endParaRPr>
+          </a:p>
+        </p:txBody>
+      </p:sp>
+      <p:sp>
+        <p:nvSpPr>
+          <p:cNvPr id="10" name="TextBox 9"/>
+          <p:cNvSpPr txBox="1"/>
+          <p:nvPr/>
+        </p:nvSpPr>
+        <p:spPr>
+          <a:xfrm>
+            <a:off x="502920" y="1280160"/>
+            <a:ext cx="3840480" cy="3291840"/>
+          </a:xfrm>
+          <a:prstGeom prst="rect">
+            <a:avLst/>
+          </a:prstGeom>
+          <a:noFill/>
+        </p:spPr>
+        <p:txBody>
+          <a:bodyPr wrap="square">
+            <a:spAutoFit/>
+          </a:bodyPr>
+          <a:lstStyle/>
+          <a:p>
+            <a:r>
+              <a:rPr sz="1200" b="1">
+                <a:solidFill>
+                  <a:srgbClr val="1F2937"/>
+                </a:solidFill>
+              </a:rPr>
+              <a:t>50 вопросов  ×  5 категорий  ×  35 документов</a:t>
+            </a:r>
+            <a:endParaRPr sz="1200" b="1">
+              <a:solidFill>
+                <a:srgbClr val="1F2937"/>
+              </a:solidFill>
+            </a:endParaRPr>
+          </a:p>
+          <a:p>
+            <a:pPr algn="l"/>
+          </a:p>
+          <a:p>
+            <a:pPr>
+              <a:spcBef>
+                <a:spcPts val="300"/>
+              </a:spcBef>
+            </a:pPr>
+            <a:r>
+              <a:rPr sz="950" b="1">
                 <a:solidFill>
                   <a:srgbClr val="00B4A6"/>
                 </a:solidFill>
-                <a:latin typeface="Calibri" pitchFamily="34" charset="0"/>
-                <a:ea typeface="Calibri" pitchFamily="34" charset="-122"/>
-                <a:cs typeface="Calibri" pitchFamily="34" charset="-120"/>
-              </a:rPr>
-              <a:t>92%</a:t>
-            </a:r>
-            <a:endParaRPr lang="en-US" sz="2800" dirty="0"/>
-          </a:p>
-        </p:txBody>
-      </p:sp>
-      <p:sp>
-        <p:nvSpPr>
-          <p:cNvPr id="10" name="Text 8"/>
-          <p:cNvSpPr/>
-          <p:nvPr/>
-        </p:nvSpPr>
-        <p:spPr>
-          <a:xfrm>
-            <a:off x="365760" y="2404872"/>
-            <a:ext cx="1965960" cy="320040"/>
-          </a:xfrm>
-          <a:prstGeom prst="rect">
-            <a:avLst/>
-          </a:prstGeom>
-          <a:noFill/>
-        </p:spPr>
-        <p:txBody>
-          <a:bodyPr wrap="square" lIns="0" tIns="0" rIns="0" bIns="0" rtlCol="0" anchor="ctr"/>
-          <a:lstStyle/>
-          <a:p>
-            <a:pPr marL="0" indent="0" algn="ctr">
-              <a:buNone/>
-            </a:pPr>
-            <a:r>
-              <a:rPr lang="ru-RU" altLang="en-US" sz="1100" dirty="0">
+              </a:rPr>
+              <a:t>  small_talk (5)</a:t>
+            </a:r>
+            <a:r>
+              <a:rPr sz="950" b="0">
                 <a:solidFill>
                   <a:srgbClr val="6B7280"/>
                 </a:solidFill>
-                <a:latin typeface="Calibri" pitchFamily="34" charset="0"/>
-                <a:ea typeface="Calibri" pitchFamily="34" charset="-122"/>
-                <a:cs typeface="Calibri" pitchFamily="34" charset="-120"/>
-                <a:sym typeface="+mn-ea"/>
-              </a:rPr>
-              <a:t>релевантность</a:t>
-            </a:r>
-            <a:endParaRPr lang="ru-RU" altLang="en-US" sz="1100" dirty="0">
+              </a:rPr>
+              <a:t>  — без обращения к базе знаний</a:t>
+            </a:r>
+            <a:endParaRPr sz="950" b="0">
               <a:solidFill>
                 <a:srgbClr val="6B7280"/>
               </a:solidFill>
-              <a:latin typeface="Calibri" pitchFamily="34" charset="0"/>
-              <a:ea typeface="Calibri" pitchFamily="34" charset="-122"/>
-              <a:cs typeface="Calibri" pitchFamily="34" charset="-120"/>
-              <a:sym typeface="+mn-ea"/>
             </a:endParaRPr>
           </a:p>
-        </p:txBody>
-      </p:sp>
-      <p:sp>
-        <p:nvSpPr>
-          <p:cNvPr id="11" name="Shape 9"/>
-          <p:cNvSpPr/>
-          <p:nvPr/>
-        </p:nvSpPr>
-        <p:spPr>
-          <a:xfrm>
-            <a:off x="2514600" y="1645920"/>
-            <a:ext cx="1965960" cy="1143000"/>
+          <a:p>
+            <a:pPr>
+              <a:spcBef>
+                <a:spcPts val="300"/>
+              </a:spcBef>
+            </a:pPr>
+            <a:r>
+              <a:rPr sz="950" b="1">
+                <a:solidFill>
+                  <a:srgbClr val="00B4A6"/>
+                </a:solidFill>
+              </a:rPr>
+              <a:t>  easy_factual (15)</a:t>
+            </a:r>
+            <a:r>
+              <a:rPr sz="950" b="0">
+                <a:solidFill>
+                  <a:srgbClr val="6B7280"/>
+                </a:solidFill>
+              </a:rPr>
+              <a:t>  — прямые фактические вопросы</a:t>
+            </a:r>
+            <a:endParaRPr sz="950" b="0">
+              <a:solidFill>
+                <a:srgbClr val="6B7280"/>
+              </a:solidFill>
+            </a:endParaRPr>
+          </a:p>
+          <a:p>
+            <a:pPr>
+              <a:spcBef>
+                <a:spcPts val="300"/>
+              </a:spcBef>
+            </a:pPr>
+            <a:r>
+              <a:rPr sz="950" b="1">
+                <a:solidFill>
+                  <a:srgbClr val="00B4A6"/>
+                </a:solidFill>
+              </a:rPr>
+              <a:t>  medium (10)</a:t>
+            </a:r>
+            <a:r>
+              <a:rPr sz="950" b="0">
+                <a:solidFill>
+                  <a:srgbClr val="6B7280"/>
+                </a:solidFill>
+              </a:rPr>
+              <a:t>  — синтез нескольких источников</a:t>
+            </a:r>
+            <a:endParaRPr sz="950" b="0">
+              <a:solidFill>
+                <a:srgbClr val="6B7280"/>
+              </a:solidFill>
+            </a:endParaRPr>
+          </a:p>
+          <a:p>
+            <a:pPr>
+              <a:spcBef>
+                <a:spcPts val="300"/>
+              </a:spcBef>
+            </a:pPr>
+            <a:r>
+              <a:rPr sz="950" b="1">
+                <a:solidFill>
+                  <a:srgbClr val="00B4A6"/>
+                </a:solidFill>
+              </a:rPr>
+              <a:t>  complex (10)</a:t>
+            </a:r>
+            <a:r>
+              <a:rPr sz="950" b="0">
+                <a:solidFill>
+                  <a:srgbClr val="6B7280"/>
+                </a:solidFill>
+              </a:rPr>
+              <a:t>  — многоаспектные запросы</a:t>
+            </a:r>
+            <a:endParaRPr sz="950" b="0">
+              <a:solidFill>
+                <a:srgbClr val="6B7280"/>
+              </a:solidFill>
+            </a:endParaRPr>
+          </a:p>
+          <a:p>
+            <a:pPr>
+              <a:spcBef>
+                <a:spcPts val="300"/>
+              </a:spcBef>
+            </a:pPr>
+            <a:r>
+              <a:rPr sz="950" b="1">
+                <a:solidFill>
+                  <a:srgbClr val="00B4A6"/>
+                </a:solidFill>
+              </a:rPr>
+              <a:t>  hallucination_trap (10)</a:t>
+            </a:r>
+            <a:r>
+              <a:rPr sz="950" b="0">
+                <a:solidFill>
+                  <a:srgbClr val="6B7280"/>
+                </a:solidFill>
+              </a:rPr>
+              <a:t>  — ловушки — ответа нет в корпусе</a:t>
+            </a:r>
+            <a:endParaRPr sz="950" b="0">
+              <a:solidFill>
+                <a:srgbClr val="6B7280"/>
+              </a:solidFill>
+            </a:endParaRPr>
+          </a:p>
+          <a:p>
+            <a:pPr algn="l"/>
+          </a:p>
+          <a:p>
+            <a:pPr algn="l"/>
+            <a:r>
+              <a:rPr sz="1100" b="1">
+                <a:solidFill>
+                  <a:srgbClr val="1F2937"/>
+                </a:solidFill>
+              </a:rPr>
+              <a:t>Стенд</a:t>
+            </a:r>
+            <a:endParaRPr sz="1100" b="1">
+              <a:solidFill>
+                <a:srgbClr val="1F2937"/>
+              </a:solidFill>
+            </a:endParaRPr>
+          </a:p>
+          <a:p>
+            <a:pPr algn="l">
+              <a:spcBef>
+                <a:spcPts val="200"/>
+              </a:spcBef>
+            </a:pPr>
+            <a:r>
+              <a:rPr sz="1000" b="0">
+                <a:solidFill>
+                  <a:srgbClr val="6B7280"/>
+                </a:solidFill>
+              </a:rPr>
+              <a:t>MacBook Pro M4  •  16 ГБ RAM</a:t>
+            </a:r>
+            <a:endParaRPr sz="1000" b="0">
+              <a:solidFill>
+                <a:srgbClr val="6B7280"/>
+              </a:solidFill>
+            </a:endParaRPr>
+          </a:p>
+          <a:p>
+            <a:pPr algn="l"/>
+          </a:p>
+          <a:p>
+            <a:pPr algn="l"/>
+            <a:r>
+              <a:rPr sz="1100" b="1">
+                <a:solidFill>
+                  <a:srgbClr val="1F2937"/>
+                </a:solidFill>
+              </a:rPr>
+              <a:t>Компоненты</a:t>
+            </a:r>
+            <a:endParaRPr sz="1100" b="1">
+              <a:solidFill>
+                <a:srgbClr val="1F2937"/>
+              </a:solidFill>
+            </a:endParaRPr>
+          </a:p>
+          <a:p>
+            <a:pPr algn="l">
+              <a:spcBef>
+                <a:spcPts val="200"/>
+              </a:spcBef>
+            </a:pPr>
+            <a:r>
+              <a:rPr sz="1000" b="0">
+                <a:solidFill>
+                  <a:srgbClr val="1F2937"/>
+                </a:solidFill>
+              </a:rPr>
+              <a:t>phi3:mini  (Ollama, Metal GPU, ~40–50 tok/s)</a:t>
+            </a:r>
+            <a:endParaRPr sz="1000" b="0">
+              <a:solidFill>
+                <a:srgbClr val="1F2937"/>
+              </a:solidFill>
+            </a:endParaRPr>
+          </a:p>
+          <a:p>
+            <a:pPr algn="l">
+              <a:spcBef>
+                <a:spcPts val="200"/>
+              </a:spcBef>
+            </a:pPr>
+            <a:r>
+              <a:rPr sz="1000" b="0">
+                <a:solidFill>
+                  <a:srgbClr val="1F2937"/>
+                </a:solidFill>
+              </a:rPr>
+              <a:t>BAAI/bge-small-en  (384-d, k=10, cosine)</a:t>
+            </a:r>
+            <a:endParaRPr sz="1000" b="0">
+              <a:solidFill>
+                <a:srgbClr val="1F2937"/>
+              </a:solidFill>
+            </a:endParaRPr>
+          </a:p>
+          <a:p>
+            <a:pPr algn="l">
+              <a:spcBef>
+                <a:spcPts val="200"/>
+              </a:spcBef>
+            </a:pPr>
+            <a:r>
+              <a:rPr sz="1000" b="0">
+                <a:solidFill>
+                  <a:srgbClr val="1F2937"/>
+                </a:solidFill>
+              </a:rPr>
+              <a:t>Qdrant + Redis + RabbitMQ  (Docker Compose)</a:t>
+            </a:r>
+            <a:endParaRPr sz="1000" b="0">
+              <a:solidFill>
+                <a:srgbClr val="1F2937"/>
+              </a:solidFill>
+            </a:endParaRPr>
+          </a:p>
+        </p:txBody>
+      </p:sp>
+      <p:sp>
+        <p:nvSpPr>
+          <p:cNvPr id="11" name="Rectangle 10"/>
+          <p:cNvSpPr/>
+          <p:nvPr/>
+        </p:nvSpPr>
+        <p:spPr>
+          <a:xfrm>
+            <a:off x="4663440" y="868680"/>
+            <a:ext cx="4114800" cy="3749040"/>
           </a:xfrm>
           <a:prstGeom prst="rect">
             <a:avLst/>
@@ -2941,31 +3262,42 @@
           <a:solidFill>
             <a:srgbClr val="FFFFFF"/>
           </a:solidFill>
-          <a:ln w="12700">
-            <a:solidFill>
-              <a:srgbClr val="E5E7EB"/>
-            </a:solidFill>
-            <a:prstDash val="solid"/>
+          <a:ln w="0">
+            <a:noFill/>
           </a:ln>
-          <a:effectLst>
-            <a:outerShdw blurRad="101600" dist="25400" dir="5400000" algn="bl" rotWithShape="0">
-              <a:srgbClr val="000000">
-                <a:alpha val="6000"/>
-              </a:srgbClr>
-            </a:outerShdw>
-          </a:effectLst>
-        </p:spPr>
-      </p:sp>
-      <p:sp>
-        <p:nvSpPr>
-          <p:cNvPr id="12" name="Shape 10"/>
-          <p:cNvSpPr/>
-          <p:nvPr/>
-        </p:nvSpPr>
-        <p:spPr>
-          <a:xfrm>
-            <a:off x="2514600" y="1645920"/>
-            <a:ext cx="1965960" cy="109728"/>
+        </p:spPr>
+        <p:style>
+          <a:lnRef idx="1">
+            <a:schemeClr val="accent1"/>
+          </a:lnRef>
+          <a:fillRef idx="3">
+            <a:schemeClr val="accent1"/>
+          </a:fillRef>
+          <a:effectRef idx="2">
+            <a:schemeClr val="accent1"/>
+          </a:effectRef>
+          <a:fontRef idx="minor">
+            <a:schemeClr val="lt1"/>
+          </a:fontRef>
+        </p:style>
+        <p:txBody>
+          <a:bodyPr rtlCol="0" anchor="ctr"/>
+          <a:lstStyle/>
+          <a:p>
+            <a:pPr algn="ctr"/>
+          </a:p>
+        </p:txBody>
+      </p:sp>
+      <p:sp>
+        <p:nvSpPr>
+          <p:cNvPr id="12" name="Rectangle 11"/>
+          <p:cNvSpPr/>
+          <p:nvPr/>
+        </p:nvSpPr>
+        <p:spPr>
+          <a:xfrm>
+            <a:off x="4663440" y="868680"/>
+            <a:ext cx="4114800" cy="365760"/>
           </a:xfrm>
           <a:prstGeom prst="rect">
             <a:avLst/>
@@ -2973,94 +3305,587 @@
           <a:solidFill>
             <a:srgbClr val="0F2A4A"/>
           </a:solidFill>
-        </p:spPr>
-      </p:sp>
-      <p:sp>
-        <p:nvSpPr>
-          <p:cNvPr id="13" name="Text 11"/>
-          <p:cNvSpPr/>
-          <p:nvPr/>
-        </p:nvSpPr>
-        <p:spPr>
-          <a:xfrm>
-            <a:off x="2514600" y="1828800"/>
-            <a:ext cx="1965960" cy="548640"/>
-          </a:xfrm>
-          <a:prstGeom prst="rect">
-            <a:avLst/>
-          </a:prstGeom>
-          <a:noFill/>
-        </p:spPr>
-        <p:txBody>
-          <a:bodyPr wrap="square" lIns="0" tIns="0" rIns="0" bIns="0" rtlCol="0" anchor="ctr"/>
-          <a:lstStyle/>
-          <a:p>
-            <a:pPr marL="0" indent="0" algn="ctr">
-              <a:buNone/>
-            </a:pPr>
-            <a:r>
-              <a:rPr lang="en-US" sz="2800" b="1" dirty="0">
+          <a:ln w="0">
+            <a:noFill/>
+          </a:ln>
+        </p:spPr>
+        <p:style>
+          <a:lnRef idx="1">
+            <a:schemeClr val="accent1"/>
+          </a:lnRef>
+          <a:fillRef idx="3">
+            <a:schemeClr val="accent1"/>
+          </a:fillRef>
+          <a:effectRef idx="2">
+            <a:schemeClr val="accent1"/>
+          </a:effectRef>
+          <a:fontRef idx="minor">
+            <a:schemeClr val="lt1"/>
+          </a:fontRef>
+        </p:style>
+        <p:txBody>
+          <a:bodyPr rtlCol="0" anchor="ctr"/>
+          <a:lstStyle/>
+          <a:p>
+            <a:pPr algn="ctr"/>
+          </a:p>
+        </p:txBody>
+      </p:sp>
+      <p:sp>
+        <p:nvSpPr>
+          <p:cNvPr id="13" name="TextBox 12"/>
+          <p:cNvSpPr txBox="1"/>
+          <p:nvPr/>
+        </p:nvSpPr>
+        <p:spPr>
+          <a:xfrm>
+            <a:off x="4800600" y="868680"/>
+            <a:ext cx="3977640" cy="365760"/>
+          </a:xfrm>
+          <a:prstGeom prst="rect">
+            <a:avLst/>
+          </a:prstGeom>
+          <a:noFill/>
+        </p:spPr>
+        <p:txBody>
+          <a:bodyPr wrap="none">
+            <a:spAutoFit/>
+          </a:bodyPr>
+          <a:lstStyle/>
+          <a:p>
+            <a:pPr algn="l"/>
+            <a:r>
+              <a:rPr sz="1400" b="1">
+                <a:solidFill>
+                  <a:srgbClr val="FFFFFF"/>
+                </a:solidFill>
+              </a:rPr>
+              <a:t>Измеряемые метрики</a:t>
+            </a:r>
+            <a:endParaRPr sz="1400" b="1">
+              <a:solidFill>
+                <a:srgbClr val="FFFFFF"/>
+              </a:solidFill>
+            </a:endParaRPr>
+          </a:p>
+        </p:txBody>
+      </p:sp>
+      <p:sp>
+        <p:nvSpPr>
+          <p:cNvPr id="14" name="TextBox 13"/>
+          <p:cNvSpPr txBox="1"/>
+          <p:nvPr/>
+        </p:nvSpPr>
+        <p:spPr>
+          <a:xfrm>
+            <a:off x="4800600" y="1280160"/>
+            <a:ext cx="3840480" cy="3397250"/>
+          </a:xfrm>
+          <a:prstGeom prst="rect">
+            <a:avLst/>
+          </a:prstGeom>
+          <a:noFill/>
+        </p:spPr>
+        <p:txBody>
+          <a:bodyPr wrap="square">
+            <a:spAutoFit/>
+          </a:bodyPr>
+          <a:lstStyle/>
+          <a:p>
+            <a:r>
+              <a:rPr sz="1100" b="1">
                 <a:solidFill>
                   <a:srgbClr val="0F2A4A"/>
                 </a:solidFill>
-                <a:latin typeface="Calibri" pitchFamily="34" charset="0"/>
-                <a:ea typeface="Calibri" pitchFamily="34" charset="-122"/>
-                <a:cs typeface="Calibri" pitchFamily="34" charset="-120"/>
-              </a:rPr>
-              <a:t>84%</a:t>
-            </a:r>
-            <a:endParaRPr lang="en-US" sz="2800" dirty="0"/>
-          </a:p>
-        </p:txBody>
-      </p:sp>
-      <p:sp>
-        <p:nvSpPr>
-          <p:cNvPr id="14" name="Text 12"/>
-          <p:cNvSpPr/>
-          <p:nvPr/>
-        </p:nvSpPr>
-        <p:spPr>
-          <a:xfrm>
-            <a:off x="2514600" y="2404872"/>
-            <a:ext cx="1965960" cy="320040"/>
-          </a:xfrm>
-          <a:prstGeom prst="rect">
-            <a:avLst/>
-          </a:prstGeom>
-          <a:noFill/>
-        </p:spPr>
-        <p:txBody>
-          <a:bodyPr wrap="square" lIns="0" tIns="0" rIns="0" bIns="0" rtlCol="0" anchor="ctr"/>
-          <a:lstStyle/>
-          <a:p>
-            <a:pPr marL="0" indent="0" algn="ctr">
-              <a:buNone/>
-            </a:pPr>
-            <a:r>
-              <a:rPr lang="en-US" sz="1100" dirty="0">
+              </a:rPr>
+              <a:t>Factual Score</a:t>
+            </a:r>
+            <a:endParaRPr sz="1100" b="1">
+              <a:solidFill>
+                <a:srgbClr val="0F2A4A"/>
+              </a:solidFill>
+            </a:endParaRPr>
+          </a:p>
+          <a:p>
+            <a:pPr algn="l">
+              <a:spcBef>
+                <a:spcPts val="300"/>
+              </a:spcBef>
+            </a:pPr>
+            <a:r>
+              <a:rPr sz="950" b="0">
                 <a:solidFill>
                   <a:srgbClr val="6B7280"/>
                 </a:solidFill>
-                <a:latin typeface="Calibri" pitchFamily="34" charset="0"/>
-                <a:ea typeface="Calibri" pitchFamily="34" charset="-122"/>
-                <a:cs typeface="Calibri" pitchFamily="34" charset="-120"/>
-              </a:rPr>
-              <a:t>точность ответа</a:t>
-            </a:r>
-            <a:endParaRPr lang="en-US" sz="1100" dirty="0"/>
-          </a:p>
-        </p:txBody>
-      </p:sp>
-      <p:sp>
-        <p:nvSpPr>
-          <p:cNvPr id="15" name="Shape 13"/>
-          <p:cNvSpPr/>
-          <p:nvPr/>
-        </p:nvSpPr>
-        <p:spPr>
-          <a:xfrm>
-            <a:off x="4663440" y="1645920"/>
-            <a:ext cx="1965960" cy="1143000"/>
+              </a:rPr>
+              <a:t>Доля ключевых фактов эталонного ответа в ответе системы; оценивается LLM-судьёй </a:t>
+            </a:r>
+            <a:r>
+              <a:rPr lang="en-US" sz="950" b="0">
+                <a:solidFill>
+                  <a:srgbClr val="6B7280"/>
+                </a:solidFill>
+              </a:rPr>
+              <a:t>(Qwen 2.5 3B) </a:t>
+            </a:r>
+            <a:r>
+              <a:rPr sz="950" b="0">
+                <a:solidFill>
+                  <a:srgbClr val="6B7280"/>
+                </a:solidFill>
+              </a:rPr>
+              <a:t>по ключевым словам</a:t>
+            </a:r>
+            <a:endParaRPr sz="950" b="0">
+              <a:solidFill>
+                <a:srgbClr val="6B7280"/>
+              </a:solidFill>
+            </a:endParaRPr>
+          </a:p>
+          <a:p>
+            <a:pPr>
+              <a:spcBef>
+                <a:spcPts val="1000"/>
+              </a:spcBef>
+            </a:pPr>
+            <a:r>
+              <a:rPr sz="1100" b="1">
+                <a:solidFill>
+                  <a:srgbClr val="0F2A4A"/>
+                </a:solidFill>
+              </a:rPr>
+              <a:t>Relevance Recall@10</a:t>
+            </a:r>
+            <a:endParaRPr sz="1100" b="1">
+              <a:solidFill>
+                <a:srgbClr val="0F2A4A"/>
+              </a:solidFill>
+            </a:endParaRPr>
+          </a:p>
+          <a:p>
+            <a:pPr algn="l">
+              <a:spcBef>
+                <a:spcPts val="300"/>
+              </a:spcBef>
+            </a:pPr>
+            <a:r>
+              <a:rPr sz="950" b="0">
+                <a:solidFill>
+                  <a:srgbClr val="6B7280"/>
+                </a:solidFill>
+              </a:rPr>
+              <a:t>Эталонный документ входит в топ-10 фрагментов, извлечённых по косинусному сходству из Qdrant</a:t>
+            </a:r>
+            <a:endParaRPr sz="950" b="0">
+              <a:solidFill>
+                <a:srgbClr val="6B7280"/>
+              </a:solidFill>
+            </a:endParaRPr>
+          </a:p>
+          <a:p>
+            <a:pPr>
+              <a:spcBef>
+                <a:spcPts val="1000"/>
+              </a:spcBef>
+            </a:pPr>
+            <a:r>
+              <a:rPr sz="1100" b="1">
+                <a:solidFill>
+                  <a:srgbClr val="0F2A4A"/>
+                </a:solidFill>
+              </a:rPr>
+              <a:t>Hallucination Rate</a:t>
+            </a:r>
+            <a:endParaRPr sz="1100" b="1">
+              <a:solidFill>
+                <a:srgbClr val="0F2A4A"/>
+              </a:solidFill>
+            </a:endParaRPr>
+          </a:p>
+          <a:p>
+            <a:pPr algn="l">
+              <a:spcBef>
+                <a:spcPts val="300"/>
+              </a:spcBef>
+            </a:pPr>
+            <a:r>
+              <a:rPr sz="950" b="0">
+                <a:solidFill>
+                  <a:srgbClr val="6B7280"/>
+                </a:solidFill>
+              </a:rPr>
+              <a:t>Доля ответов с выдуманными фактами среди вопросов-ловушек (информация заведомо отсутствует в </a:t>
+            </a:r>
+            <a:r>
+              <a:rPr lang="ru-RU" sz="950" b="0">
+                <a:solidFill>
+                  <a:srgbClr val="6B7280"/>
+                </a:solidFill>
+              </a:rPr>
+              <a:t>данных</a:t>
+            </a:r>
+            <a:r>
+              <a:rPr sz="950" b="0">
+                <a:solidFill>
+                  <a:srgbClr val="6B7280"/>
+                </a:solidFill>
+              </a:rPr>
+              <a:t>)</a:t>
+            </a:r>
+            <a:endParaRPr sz="950" b="0">
+              <a:solidFill>
+                <a:srgbClr val="6B7280"/>
+              </a:solidFill>
+            </a:endParaRPr>
+          </a:p>
+          <a:p>
+            <a:pPr>
+              <a:spcBef>
+                <a:spcPts val="1000"/>
+              </a:spcBef>
+            </a:pPr>
+            <a:r>
+              <a:rPr sz="1100" b="1">
+                <a:solidFill>
+                  <a:srgbClr val="0F2A4A"/>
+                </a:solidFill>
+              </a:rPr>
+              <a:t>TTFT (Time To First Token)</a:t>
+            </a:r>
+            <a:endParaRPr sz="1100" b="1">
+              <a:solidFill>
+                <a:srgbClr val="0F2A4A"/>
+              </a:solidFill>
+            </a:endParaRPr>
+          </a:p>
+          <a:p>
+            <a:pPr algn="l">
+              <a:spcBef>
+                <a:spcPts val="300"/>
+              </a:spcBef>
+            </a:pPr>
+            <a:r>
+              <a:rPr sz="950" b="0">
+                <a:solidFill>
+                  <a:srgbClr val="6B7280"/>
+                </a:solidFill>
+              </a:rPr>
+              <a:t>Задержка от отправки POST-запроса до появления первого токена в SSE-потоке: HTTP + AMQP + classify + RAG + первый токен, мс</a:t>
+            </a:r>
+            <a:endParaRPr sz="950" b="0">
+              <a:solidFill>
+                <a:srgbClr val="6B7280"/>
+              </a:solidFill>
+            </a:endParaRPr>
+          </a:p>
+          <a:p>
+            <a:pPr>
+              <a:spcBef>
+                <a:spcPts val="1000"/>
+              </a:spcBef>
+            </a:pPr>
+            <a:r>
+              <a:rPr sz="1100" b="1">
+                <a:solidFill>
+                  <a:srgbClr val="0F2A4A"/>
+                </a:solidFill>
+              </a:rPr>
+              <a:t>Total Time</a:t>
+            </a:r>
+            <a:endParaRPr sz="1100" b="1">
+              <a:solidFill>
+                <a:srgbClr val="0F2A4A"/>
+              </a:solidFill>
+            </a:endParaRPr>
+          </a:p>
+          <a:p>
+            <a:pPr algn="l">
+              <a:spcBef>
+                <a:spcPts val="300"/>
+              </a:spcBef>
+            </a:pPr>
+            <a:r>
+              <a:rPr sz="950" b="0">
+                <a:solidFill>
+                  <a:srgbClr val="6B7280"/>
+                </a:solidFill>
+              </a:rPr>
+              <a:t>Полное время от запроса до последнего токена ответа, включает генерацию и обновление диалогового резюме в Redis, мс</a:t>
+            </a:r>
+            <a:endParaRPr sz="950" b="0">
+              <a:solidFill>
+                <a:srgbClr val="6B7280"/>
+              </a:solidFill>
+            </a:endParaRPr>
+          </a:p>
+        </p:txBody>
+      </p:sp>
+    </p:spTree>
+  </p:cSld>
+  <p:clrMapOvr>
+    <a:masterClrMapping/>
+  </p:clrMapOvr>
+</p:sld>
+</file>
+
+<file path=ppt/slides/slide12.xml><?xml version="1.0" encoding="utf-8"?>
+<p:sld xmlns:a="http://schemas.openxmlformats.org/drawingml/2006/main" xmlns:r="http://schemas.openxmlformats.org/officeDocument/2006/relationships" xmlns:p="http://schemas.openxmlformats.org/presentationml/2006/main">
+  <p:cSld>
+    <p:spTree>
+      <p:nvGrpSpPr>
+        <p:cNvPr id="1" name=""/>
+        <p:cNvGrpSpPr/>
+        <p:nvPr/>
+      </p:nvGrpSpPr>
+      <p:grpSpPr/>
+      <p:sp>
+        <p:nvSpPr>
+          <p:cNvPr id="2" name="Rectangle 1"/>
+          <p:cNvSpPr/>
+          <p:nvPr/>
+        </p:nvSpPr>
+        <p:spPr>
+          <a:xfrm>
+            <a:off x="0" y="0"/>
+            <a:ext cx="9144000" cy="502920"/>
+          </a:xfrm>
+          <a:prstGeom prst="rect">
+            <a:avLst/>
+          </a:prstGeom>
+          <a:solidFill>
+            <a:srgbClr val="0F2A4A"/>
+          </a:solidFill>
+          <a:ln w="0">
+            <a:noFill/>
+          </a:ln>
+        </p:spPr>
+        <p:style>
+          <a:lnRef idx="1">
+            <a:schemeClr val="accent1"/>
+          </a:lnRef>
+          <a:fillRef idx="3">
+            <a:schemeClr val="accent1"/>
+          </a:fillRef>
+          <a:effectRef idx="2">
+            <a:schemeClr val="accent1"/>
+          </a:effectRef>
+          <a:fontRef idx="minor">
+            <a:schemeClr val="lt1"/>
+          </a:fontRef>
+        </p:style>
+        <p:txBody>
+          <a:bodyPr rtlCol="0" anchor="ctr"/>
+          <a:lstStyle/>
+          <a:p>
+            <a:pPr algn="ctr"/>
+          </a:p>
+        </p:txBody>
+      </p:sp>
+      <p:sp>
+        <p:nvSpPr>
+          <p:cNvPr id="3" name="TextBox 2"/>
+          <p:cNvSpPr txBox="1"/>
+          <p:nvPr/>
+        </p:nvSpPr>
+        <p:spPr>
+          <a:xfrm>
+            <a:off x="365760" y="45720"/>
+            <a:ext cx="7772400" cy="411480"/>
+          </a:xfrm>
+          <a:prstGeom prst="rect">
+            <a:avLst/>
+          </a:prstGeom>
+          <a:noFill/>
+        </p:spPr>
+        <p:txBody>
+          <a:bodyPr wrap="none">
+            <a:spAutoFit/>
+          </a:bodyPr>
+          <a:lstStyle/>
+          <a:p>
+            <a:pPr algn="l"/>
+            <a:r>
+              <a:rPr sz="2200" b="1">
+                <a:solidFill>
+                  <a:srgbClr val="FFFFFF"/>
+                </a:solidFill>
+              </a:rPr>
+              <a:t>Результаты оценки</a:t>
+            </a:r>
+            <a:endParaRPr sz="2200" b="1">
+              <a:solidFill>
+                <a:srgbClr val="FFFFFF"/>
+              </a:solidFill>
+            </a:endParaRPr>
+          </a:p>
+        </p:txBody>
+      </p:sp>
+      <p:sp>
+        <p:nvSpPr>
+          <p:cNvPr id="4" name="TextBox 3"/>
+          <p:cNvSpPr txBox="1"/>
+          <p:nvPr/>
+        </p:nvSpPr>
+        <p:spPr>
+          <a:xfrm>
+            <a:off x="8229600" y="45720"/>
+            <a:ext cx="822960" cy="411480"/>
+          </a:xfrm>
+          <a:prstGeom prst="rect">
+            <a:avLst/>
+          </a:prstGeom>
+          <a:noFill/>
+        </p:spPr>
+        <p:txBody>
+          <a:bodyPr wrap="none">
+            <a:spAutoFit/>
+          </a:bodyPr>
+          <a:lstStyle/>
+          <a:p>
+            <a:pPr algn="r"/>
+            <a:r>
+              <a:rPr sz="1200" b="0">
+                <a:solidFill>
+                  <a:srgbClr val="00B4A6"/>
+                </a:solidFill>
+              </a:rPr>
+              <a:t>12</a:t>
+            </a:r>
+            <a:endParaRPr sz="1200" b="0">
+              <a:solidFill>
+                <a:srgbClr val="00B4A6"/>
+              </a:solidFill>
+            </a:endParaRPr>
+          </a:p>
+        </p:txBody>
+      </p:sp>
+      <p:sp>
+        <p:nvSpPr>
+          <p:cNvPr id="5" name="TextBox 4"/>
+          <p:cNvSpPr txBox="1"/>
+          <p:nvPr/>
+        </p:nvSpPr>
+        <p:spPr>
+          <a:xfrm>
+            <a:off x="365760" y="4892040"/>
+            <a:ext cx="6400800" cy="228600"/>
+          </a:xfrm>
+          <a:prstGeom prst="rect">
+            <a:avLst/>
+          </a:prstGeom>
+          <a:noFill/>
+        </p:spPr>
+        <p:txBody>
+          <a:bodyPr wrap="none">
+            <a:spAutoFit/>
+          </a:bodyPr>
+          <a:lstStyle/>
+          <a:p>
+            <a:pPr algn="l"/>
+            <a:r>
+              <a:rPr sz="900" b="0">
+                <a:solidFill>
+                  <a:srgbClr val="6B7280"/>
+                </a:solidFill>
+              </a:rPr>
+              <a:t>Атрошенко Б. С.  •  ВКР  •  ЯрГУ, 2026</a:t>
+            </a:r>
+            <a:endParaRPr sz="900" b="0">
+              <a:solidFill>
+                <a:srgbClr val="6B7280"/>
+              </a:solidFill>
+            </a:endParaRPr>
+          </a:p>
+        </p:txBody>
+      </p:sp>
+      <p:sp>
+        <p:nvSpPr>
+          <p:cNvPr id="6" name="TextBox 5"/>
+          <p:cNvSpPr txBox="1"/>
+          <p:nvPr/>
+        </p:nvSpPr>
+        <p:spPr>
+          <a:xfrm>
+            <a:off x="7863840" y="4892040"/>
+            <a:ext cx="914400" cy="228600"/>
+          </a:xfrm>
+          <a:prstGeom prst="rect">
+            <a:avLst/>
+          </a:prstGeom>
+          <a:noFill/>
+        </p:spPr>
+        <p:txBody>
+          <a:bodyPr wrap="none">
+            <a:spAutoFit/>
+          </a:bodyPr>
+          <a:lstStyle/>
+          <a:p>
+            <a:pPr algn="r"/>
+            <a:r>
+              <a:rPr sz="900" b="0">
+                <a:solidFill>
+                  <a:srgbClr val="6B7280"/>
+                </a:solidFill>
+              </a:rPr>
+              <a:t>12 / 14</a:t>
+            </a:r>
+            <a:endParaRPr sz="900" b="0">
+              <a:solidFill>
+                <a:srgbClr val="6B7280"/>
+              </a:solidFill>
+            </a:endParaRPr>
+          </a:p>
+        </p:txBody>
+      </p:sp>
+      <p:sp>
+        <p:nvSpPr>
+          <p:cNvPr id="7" name="TextBox 6"/>
+          <p:cNvSpPr txBox="1"/>
+          <p:nvPr/>
+        </p:nvSpPr>
+        <p:spPr>
+          <a:xfrm>
+            <a:off x="455295" y="510540"/>
+            <a:ext cx="8412480" cy="228600"/>
+          </a:xfrm>
+          <a:prstGeom prst="rect">
+            <a:avLst/>
+          </a:prstGeom>
+          <a:noFill/>
+        </p:spPr>
+        <p:txBody>
+          <a:bodyPr wrap="none">
+            <a:spAutoFit/>
+          </a:bodyPr>
+          <a:lstStyle/>
+          <a:p>
+            <a:pPr algn="ctr"/>
+            <a:r>
+              <a:rPr sz="1000" b="0">
+                <a:solidFill>
+                  <a:srgbClr val="6B7280"/>
+                </a:solidFill>
+              </a:rPr>
+              <a:t>Оценка на 50 вопросах по корпусу FinBridge (35 документов) · симуляция на MacBook Pro M4 16 ГБ</a:t>
+            </a:r>
+            <a:endParaRPr sz="1000" b="0">
+              <a:solidFill>
+                <a:srgbClr val="6B7280"/>
+              </a:solidFill>
+            </a:endParaRPr>
+          </a:p>
+        </p:txBody>
+      </p:sp>
+      <p:sp>
+        <p:nvSpPr>
+          <p:cNvPr id="8" name="Rectangle 7"/>
+          <p:cNvSpPr/>
+          <p:nvPr/>
+        </p:nvSpPr>
+        <p:spPr>
+          <a:xfrm>
+            <a:off x="365760" y="960755"/>
+            <a:ext cx="1965960" cy="845185"/>
           </a:xfrm>
           <a:prstGeom prst="rect">
             <a:avLst/>
@@ -3068,30 +3893,369 @@
           <a:solidFill>
             <a:srgbClr val="FFFFFF"/>
           </a:solidFill>
-          <a:ln w="12700">
-            <a:solidFill>
-              <a:srgbClr val="E5E7EB"/>
-            </a:solidFill>
-            <a:prstDash val="solid"/>
+          <a:ln w="0">
+            <a:noFill/>
           </a:ln>
-          <a:effectLst>
-            <a:outerShdw blurRad="101600" dist="25400" dir="5400000" algn="bl" rotWithShape="0">
-              <a:srgbClr val="000000">
-                <a:alpha val="6000"/>
-              </a:srgbClr>
-            </a:outerShdw>
-          </a:effectLst>
-        </p:spPr>
-      </p:sp>
-      <p:sp>
-        <p:nvSpPr>
-          <p:cNvPr id="16" name="Shape 14"/>
-          <p:cNvSpPr/>
-          <p:nvPr/>
-        </p:nvSpPr>
-        <p:spPr>
-          <a:xfrm>
-            <a:off x="4663440" y="1645920"/>
+        </p:spPr>
+        <p:style>
+          <a:lnRef idx="1">
+            <a:schemeClr val="accent1"/>
+          </a:lnRef>
+          <a:fillRef idx="3">
+            <a:schemeClr val="accent1"/>
+          </a:fillRef>
+          <a:effectRef idx="2">
+            <a:schemeClr val="accent1"/>
+          </a:effectRef>
+          <a:fontRef idx="minor">
+            <a:schemeClr val="lt1"/>
+          </a:fontRef>
+        </p:style>
+        <p:txBody>
+          <a:bodyPr rtlCol="0" anchor="ctr"/>
+          <a:lstStyle/>
+          <a:p>
+            <a:pPr algn="ctr"/>
+          </a:p>
+        </p:txBody>
+      </p:sp>
+      <p:sp>
+        <p:nvSpPr>
+          <p:cNvPr id="9" name="Rectangle 8"/>
+          <p:cNvSpPr/>
+          <p:nvPr/>
+        </p:nvSpPr>
+        <p:spPr>
+          <a:xfrm>
+            <a:off x="387985" y="1609090"/>
+            <a:ext cx="1965960" cy="109728"/>
+          </a:xfrm>
+          <a:prstGeom prst="rect">
+            <a:avLst/>
+          </a:prstGeom>
+          <a:solidFill>
+            <a:srgbClr val="00B4A6"/>
+          </a:solidFill>
+          <a:ln w="0">
+            <a:noFill/>
+          </a:ln>
+        </p:spPr>
+        <p:style>
+          <a:lnRef idx="1">
+            <a:schemeClr val="accent1"/>
+          </a:lnRef>
+          <a:fillRef idx="3">
+            <a:schemeClr val="accent1"/>
+          </a:fillRef>
+          <a:effectRef idx="2">
+            <a:schemeClr val="accent1"/>
+          </a:effectRef>
+          <a:fontRef idx="minor">
+            <a:schemeClr val="lt1"/>
+          </a:fontRef>
+        </p:style>
+        <p:txBody>
+          <a:bodyPr rtlCol="0" anchor="ctr"/>
+          <a:lstStyle/>
+          <a:p>
+            <a:pPr algn="ctr"/>
+          </a:p>
+        </p:txBody>
+      </p:sp>
+      <p:sp>
+        <p:nvSpPr>
+          <p:cNvPr id="10" name="TextBox 9"/>
+          <p:cNvSpPr txBox="1"/>
+          <p:nvPr/>
+        </p:nvSpPr>
+        <p:spPr>
+          <a:xfrm>
+            <a:off x="410210" y="960120"/>
+            <a:ext cx="1965960" cy="548640"/>
+          </a:xfrm>
+          <a:prstGeom prst="rect">
+            <a:avLst/>
+          </a:prstGeom>
+          <a:noFill/>
+        </p:spPr>
+        <p:txBody>
+          <a:bodyPr wrap="none">
+            <a:spAutoFit/>
+          </a:bodyPr>
+          <a:lstStyle/>
+          <a:p>
+            <a:pPr algn="ctr"/>
+            <a:r>
+              <a:rPr sz="2800" b="1">
+                <a:solidFill>
+                  <a:srgbClr val="00B4A6"/>
+                </a:solidFill>
+              </a:rPr>
+              <a:t>0.93</a:t>
+            </a:r>
+            <a:endParaRPr sz="2800" b="1">
+              <a:solidFill>
+                <a:srgbClr val="00B4A6"/>
+              </a:solidFill>
+            </a:endParaRPr>
+          </a:p>
+        </p:txBody>
+      </p:sp>
+      <p:sp>
+        <p:nvSpPr>
+          <p:cNvPr id="11" name="TextBox 10"/>
+          <p:cNvSpPr txBox="1"/>
+          <p:nvPr/>
+        </p:nvSpPr>
+        <p:spPr>
+          <a:xfrm>
+            <a:off x="365760" y="1399032"/>
+            <a:ext cx="1965960" cy="320040"/>
+          </a:xfrm>
+          <a:prstGeom prst="rect">
+            <a:avLst/>
+          </a:prstGeom>
+          <a:noFill/>
+        </p:spPr>
+        <p:txBody>
+          <a:bodyPr wrap="none">
+            <a:spAutoFit/>
+          </a:bodyPr>
+          <a:lstStyle/>
+          <a:p>
+            <a:pPr algn="ctr"/>
+            <a:r>
+              <a:rPr sz="1000" b="0">
+                <a:solidFill>
+                  <a:srgbClr val="6B7280"/>
+                </a:solidFill>
+              </a:rPr>
+              <a:t>Factual Score (avg)</a:t>
+            </a:r>
+            <a:endParaRPr sz="1000" b="0">
+              <a:solidFill>
+                <a:srgbClr val="6B7280"/>
+              </a:solidFill>
+            </a:endParaRPr>
+          </a:p>
+        </p:txBody>
+      </p:sp>
+      <p:sp>
+        <p:nvSpPr>
+          <p:cNvPr id="12" name="Rectangle 11"/>
+          <p:cNvSpPr/>
+          <p:nvPr/>
+        </p:nvSpPr>
+        <p:spPr>
+          <a:xfrm>
+            <a:off x="2514600" y="731520"/>
+            <a:ext cx="1965960" cy="1074420"/>
+          </a:xfrm>
+          <a:prstGeom prst="rect">
+            <a:avLst/>
+          </a:prstGeom>
+          <a:solidFill>
+            <a:srgbClr val="FFFFFF"/>
+          </a:solidFill>
+          <a:ln w="0">
+            <a:noFill/>
+          </a:ln>
+        </p:spPr>
+        <p:style>
+          <a:lnRef idx="1">
+            <a:schemeClr val="accent1"/>
+          </a:lnRef>
+          <a:fillRef idx="3">
+            <a:schemeClr val="accent1"/>
+          </a:fillRef>
+          <a:effectRef idx="2">
+            <a:schemeClr val="accent1"/>
+          </a:effectRef>
+          <a:fontRef idx="minor">
+            <a:schemeClr val="lt1"/>
+          </a:fontRef>
+        </p:style>
+        <p:txBody>
+          <a:bodyPr rtlCol="0" anchor="ctr"/>
+          <a:lstStyle/>
+          <a:p>
+            <a:pPr algn="ctr"/>
+          </a:p>
+        </p:txBody>
+      </p:sp>
+      <p:sp>
+        <p:nvSpPr>
+          <p:cNvPr id="13" name="Rectangle 12"/>
+          <p:cNvSpPr/>
+          <p:nvPr/>
+        </p:nvSpPr>
+        <p:spPr>
+          <a:xfrm>
+            <a:off x="2526030" y="1609090"/>
+            <a:ext cx="1965960" cy="109728"/>
+          </a:xfrm>
+          <a:prstGeom prst="rect">
+            <a:avLst/>
+          </a:prstGeom>
+          <a:solidFill>
+            <a:srgbClr val="00B4A6"/>
+          </a:solidFill>
+          <a:ln w="0">
+            <a:noFill/>
+          </a:ln>
+        </p:spPr>
+        <p:style>
+          <a:lnRef idx="1">
+            <a:schemeClr val="accent1"/>
+          </a:lnRef>
+          <a:fillRef idx="3">
+            <a:schemeClr val="accent1"/>
+          </a:fillRef>
+          <a:effectRef idx="2">
+            <a:schemeClr val="accent1"/>
+          </a:effectRef>
+          <a:fontRef idx="minor">
+            <a:schemeClr val="lt1"/>
+          </a:fontRef>
+        </p:style>
+        <p:txBody>
+          <a:bodyPr rtlCol="0" anchor="ctr"/>
+          <a:lstStyle/>
+          <a:p>
+            <a:pPr algn="ctr"/>
+          </a:p>
+        </p:txBody>
+      </p:sp>
+      <p:sp>
+        <p:nvSpPr>
+          <p:cNvPr id="14" name="TextBox 13"/>
+          <p:cNvSpPr txBox="1"/>
+          <p:nvPr/>
+        </p:nvSpPr>
+        <p:spPr>
+          <a:xfrm>
+            <a:off x="2514600" y="868680"/>
+            <a:ext cx="1965960" cy="502920"/>
+          </a:xfrm>
+          <a:prstGeom prst="rect">
+            <a:avLst/>
+          </a:prstGeom>
+          <a:noFill/>
+        </p:spPr>
+        <p:txBody>
+          <a:bodyPr wrap="none">
+            <a:noAutofit/>
+          </a:bodyPr>
+          <a:lstStyle/>
+          <a:p>
+            <a:pPr algn="ctr"/>
+            <a:r>
+              <a:rPr sz="2800" b="1">
+                <a:solidFill>
+                  <a:srgbClr val="16A34A"/>
+                </a:solidFill>
+              </a:rPr>
+              <a:t>1.00</a:t>
+            </a:r>
+            <a:endParaRPr sz="2800" b="1">
+              <a:solidFill>
+                <a:srgbClr val="16A34A"/>
+              </a:solidFill>
+            </a:endParaRPr>
+          </a:p>
+        </p:txBody>
+      </p:sp>
+      <p:sp>
+        <p:nvSpPr>
+          <p:cNvPr id="15" name="TextBox 14"/>
+          <p:cNvSpPr txBox="1"/>
+          <p:nvPr/>
+        </p:nvSpPr>
+        <p:spPr>
+          <a:xfrm>
+            <a:off x="2514600" y="1399032"/>
+            <a:ext cx="1965960" cy="320040"/>
+          </a:xfrm>
+          <a:prstGeom prst="rect">
+            <a:avLst/>
+          </a:prstGeom>
+          <a:noFill/>
+        </p:spPr>
+        <p:txBody>
+          <a:bodyPr wrap="none">
+            <a:spAutoFit/>
+          </a:bodyPr>
+          <a:lstStyle/>
+          <a:p>
+            <a:pPr algn="ctr"/>
+            <a:r>
+              <a:rPr sz="1000" b="0">
+                <a:solidFill>
+                  <a:srgbClr val="6B7280"/>
+                </a:solidFill>
+              </a:rPr>
+              <a:t>Recall@10 (avg)</a:t>
+            </a:r>
+            <a:endParaRPr sz="1000" b="0">
+              <a:solidFill>
+                <a:srgbClr val="6B7280"/>
+              </a:solidFill>
+            </a:endParaRPr>
+          </a:p>
+        </p:txBody>
+      </p:sp>
+      <p:sp>
+        <p:nvSpPr>
+          <p:cNvPr id="16" name="Rectangle 15"/>
+          <p:cNvSpPr/>
+          <p:nvPr/>
+        </p:nvSpPr>
+        <p:spPr>
+          <a:xfrm>
+            <a:off x="4663440" y="777240"/>
+            <a:ext cx="1965960" cy="1028700"/>
+          </a:xfrm>
+          <a:prstGeom prst="rect">
+            <a:avLst/>
+          </a:prstGeom>
+          <a:solidFill>
+            <a:srgbClr val="FFFFFF"/>
+          </a:solidFill>
+          <a:ln w="0">
+            <a:noFill/>
+          </a:ln>
+        </p:spPr>
+        <p:style>
+          <a:lnRef idx="1">
+            <a:schemeClr val="accent1"/>
+          </a:lnRef>
+          <a:fillRef idx="3">
+            <a:schemeClr val="accent1"/>
+          </a:fillRef>
+          <a:effectRef idx="2">
+            <a:schemeClr val="accent1"/>
+          </a:effectRef>
+          <a:fontRef idx="minor">
+            <a:schemeClr val="lt1"/>
+          </a:fontRef>
+        </p:style>
+        <p:txBody>
+          <a:bodyPr rtlCol="0" anchor="ctr"/>
+          <a:lstStyle/>
+          <a:p>
+            <a:pPr algn="ctr"/>
+          </a:p>
+        </p:txBody>
+      </p:sp>
+      <p:sp>
+        <p:nvSpPr>
+          <p:cNvPr id="17" name="Rectangle 16"/>
+          <p:cNvSpPr/>
+          <p:nvPr/>
+        </p:nvSpPr>
+        <p:spPr>
+          <a:xfrm>
+            <a:off x="4686300" y="1609090"/>
             <a:ext cx="1965960" cy="109728"/>
           </a:xfrm>
           <a:prstGeom prst="rect">
@@ -3100,55 +4264,80 @@
           <a:solidFill>
             <a:srgbClr val="F4A261"/>
           </a:solidFill>
-        </p:spPr>
-      </p:sp>
-      <p:sp>
-        <p:nvSpPr>
-          <p:cNvPr id="17" name="Text 15"/>
-          <p:cNvSpPr/>
-          <p:nvPr/>
-        </p:nvSpPr>
-        <p:spPr>
-          <a:xfrm>
-            <a:off x="4663440" y="1828800"/>
-            <a:ext cx="1965960" cy="548640"/>
-          </a:xfrm>
-          <a:prstGeom prst="rect">
-            <a:avLst/>
-          </a:prstGeom>
-          <a:noFill/>
-        </p:spPr>
-        <p:txBody>
-          <a:bodyPr wrap="square" lIns="0" tIns="0" rIns="0" bIns="0" rtlCol="0" anchor="ctr"/>
-          <a:lstStyle/>
-          <a:p>
-            <a:pPr marL="0" indent="0" algn="ctr">
-              <a:buNone/>
-            </a:pPr>
-            <a:r>
-              <a:rPr lang="en-US" sz="2800" b="1" dirty="0">
+          <a:ln w="0">
+            <a:noFill/>
+          </a:ln>
+        </p:spPr>
+        <p:style>
+          <a:lnRef idx="1">
+            <a:schemeClr val="accent1"/>
+          </a:lnRef>
+          <a:fillRef idx="3">
+            <a:schemeClr val="accent1"/>
+          </a:fillRef>
+          <a:effectRef idx="2">
+            <a:schemeClr val="accent1"/>
+          </a:effectRef>
+          <a:fontRef idx="minor">
+            <a:schemeClr val="lt1"/>
+          </a:fontRef>
+        </p:style>
+        <p:txBody>
+          <a:bodyPr rtlCol="0" anchor="ctr"/>
+          <a:lstStyle/>
+          <a:p>
+            <a:pPr algn="ctr"/>
+          </a:p>
+        </p:txBody>
+      </p:sp>
+      <p:sp>
+        <p:nvSpPr>
+          <p:cNvPr id="18" name="TextBox 17"/>
+          <p:cNvSpPr txBox="1"/>
+          <p:nvPr/>
+        </p:nvSpPr>
+        <p:spPr>
+          <a:xfrm>
+            <a:off x="4663440" y="873125"/>
+            <a:ext cx="1965960" cy="498475"/>
+          </a:xfrm>
+          <a:prstGeom prst="rect">
+            <a:avLst/>
+          </a:prstGeom>
+          <a:noFill/>
+        </p:spPr>
+        <p:txBody>
+          <a:bodyPr wrap="none">
+            <a:noAutofit/>
+          </a:bodyPr>
+          <a:lstStyle/>
+          <a:p>
+            <a:pPr algn="ctr"/>
+            <a:r>
+              <a:rPr sz="2800" b="1">
                 <a:solidFill>
                   <a:srgbClr val="F4A261"/>
                 </a:solidFill>
-                <a:latin typeface="Calibri" pitchFamily="34" charset="0"/>
-                <a:ea typeface="Calibri" pitchFamily="34" charset="-122"/>
-                <a:cs typeface="Calibri" pitchFamily="34" charset="-120"/>
-              </a:rPr>
-              <a:t>8%</a:t>
-            </a:r>
-            <a:endParaRPr lang="en-US" sz="2800" dirty="0"/>
-          </a:p>
-        </p:txBody>
-      </p:sp>
-      <p:sp>
-        <p:nvSpPr>
-          <p:cNvPr id="18" name="Text 16"/>
-          <p:cNvSpPr/>
-          <p:nvPr/>
-        </p:nvSpPr>
-        <p:spPr>
-          <a:xfrm>
-            <a:off x="4663440" y="2404872"/>
+              </a:rPr>
+              <a:t>4 / 10</a:t>
+            </a:r>
+            <a:endParaRPr sz="2800" b="1">
+              <a:solidFill>
+                <a:srgbClr val="F4A261"/>
+              </a:solidFill>
+            </a:endParaRPr>
+          </a:p>
+        </p:txBody>
+      </p:sp>
+      <p:sp>
+        <p:nvSpPr>
+          <p:cNvPr id="19" name="TextBox 18"/>
+          <p:cNvSpPr txBox="1"/>
+          <p:nvPr/>
+        </p:nvSpPr>
+        <p:spPr>
+          <a:xfrm>
+            <a:off x="4663440" y="1399032"/>
             <a:ext cx="1965960" cy="320040"/>
           </a:xfrm>
           <a:prstGeom prst="rect">
@@ -3157,37 +4346,38 @@
           <a:noFill/>
         </p:spPr>
         <p:txBody>
-          <a:bodyPr wrap="square" lIns="0" tIns="0" rIns="0" bIns="0" rtlCol="0" anchor="ctr"/>
-          <a:lstStyle/>
-          <a:p>
-            <a:pPr marL="0" indent="0" algn="ctr">
-              <a:buNone/>
-            </a:pPr>
-            <a:r>
-              <a:rPr lang="en-US" sz="1100" dirty="0">
+          <a:bodyPr wrap="none">
+            <a:spAutoFit/>
+          </a:bodyPr>
+          <a:lstStyle/>
+          <a:p>
+            <a:pPr algn="ctr"/>
+            <a:r>
+              <a:rPr sz="1000" b="0">
                 <a:solidFill>
                   <a:srgbClr val="6B7280"/>
                 </a:solidFill>
-                <a:latin typeface="Calibri" pitchFamily="34" charset="0"/>
-                <a:ea typeface="Calibri" pitchFamily="34" charset="-122"/>
-                <a:cs typeface="Calibri" pitchFamily="34" charset="-120"/>
-              </a:rPr>
-              <a:t>галлюцинации</a:t>
-            </a:r>
-            <a:endParaRPr lang="en-US" sz="1100" dirty="0"/>
-          </a:p>
-        </p:txBody>
-      </p:sp>
-      <p:sp>
-        <p:nvSpPr>
-          <p:cNvPr id="19" name="Shape 17"/>
-          <p:cNvSpPr/>
-          <p:nvPr/>
-        </p:nvSpPr>
-        <p:spPr>
-          <a:xfrm>
-            <a:off x="6812280" y="1645920"/>
-            <a:ext cx="1965960" cy="1143000"/>
+              </a:rPr>
+              <a:t>Галлюцинации (ловушки)</a:t>
+            </a:r>
+            <a:endParaRPr sz="1000" b="0">
+              <a:solidFill>
+                <a:srgbClr val="6B7280"/>
+              </a:solidFill>
+            </a:endParaRPr>
+          </a:p>
+        </p:txBody>
+      </p:sp>
+      <p:sp>
+        <p:nvSpPr>
+          <p:cNvPr id="20" name="Rectangle 19"/>
+          <p:cNvSpPr/>
+          <p:nvPr/>
+        </p:nvSpPr>
+        <p:spPr>
+          <a:xfrm>
+            <a:off x="6812280" y="723900"/>
+            <a:ext cx="1965960" cy="1082040"/>
           </a:xfrm>
           <a:prstGeom prst="rect">
             <a:avLst/>
@@ -3195,49 +4385,84 @@
           <a:solidFill>
             <a:srgbClr val="FFFFFF"/>
           </a:solidFill>
-          <a:ln w="12700">
-            <a:solidFill>
-              <a:srgbClr val="E5E7EB"/>
-            </a:solidFill>
-            <a:prstDash val="solid"/>
+          <a:ln w="0">
+            <a:noFill/>
           </a:ln>
-          <a:effectLst>
-            <a:outerShdw blurRad="101600" dist="25400" dir="5400000" algn="bl" rotWithShape="0">
-              <a:srgbClr val="000000">
-                <a:alpha val="6000"/>
-              </a:srgbClr>
-            </a:outerShdw>
-          </a:effectLst>
-        </p:spPr>
-      </p:sp>
-      <p:sp>
-        <p:nvSpPr>
-          <p:cNvPr id="20" name="Shape 18"/>
-          <p:cNvSpPr/>
-          <p:nvPr/>
-        </p:nvSpPr>
-        <p:spPr>
-          <a:xfrm>
-            <a:off x="6812280" y="1645920"/>
+        </p:spPr>
+        <p:style>
+          <a:lnRef idx="1">
+            <a:schemeClr val="accent1"/>
+          </a:lnRef>
+          <a:fillRef idx="3">
+            <a:schemeClr val="accent1"/>
+          </a:fillRef>
+          <a:effectRef idx="2">
+            <a:schemeClr val="accent1"/>
+          </a:effectRef>
+          <a:fontRef idx="minor">
+            <a:schemeClr val="lt1"/>
+          </a:fontRef>
+        </p:style>
+        <p:txBody>
+          <a:bodyPr rtlCol="0" anchor="ctr"/>
+          <a:lstStyle/>
+          <a:p>
+            <a:pPr algn="ctr"/>
+          </a:p>
+        </p:txBody>
+      </p:sp>
+      <p:sp>
+        <p:nvSpPr>
+          <p:cNvPr id="21" name="Rectangle 20"/>
+          <p:cNvSpPr/>
+          <p:nvPr/>
+        </p:nvSpPr>
+        <p:spPr>
+          <a:xfrm>
+            <a:off x="6812280" y="1607185"/>
             <a:ext cx="1965960" cy="109728"/>
           </a:xfrm>
           <a:prstGeom prst="rect">
             <a:avLst/>
           </a:prstGeom>
           <a:solidFill>
-            <a:srgbClr val="00B4A6"/>
+            <a:srgbClr val="EF4444"/>
           </a:solidFill>
-        </p:spPr>
-      </p:sp>
-      <p:sp>
-        <p:nvSpPr>
-          <p:cNvPr id="21" name="Text 19"/>
-          <p:cNvSpPr/>
-          <p:nvPr/>
-        </p:nvSpPr>
-        <p:spPr>
-          <a:xfrm>
-            <a:off x="6812280" y="1828800"/>
+          <a:ln w="0">
+            <a:noFill/>
+          </a:ln>
+        </p:spPr>
+        <p:style>
+          <a:lnRef idx="1">
+            <a:schemeClr val="accent1"/>
+          </a:lnRef>
+          <a:fillRef idx="3">
+            <a:schemeClr val="accent1"/>
+          </a:fillRef>
+          <a:effectRef idx="2">
+            <a:schemeClr val="accent1"/>
+          </a:effectRef>
+          <a:fontRef idx="minor">
+            <a:schemeClr val="lt1"/>
+          </a:fontRef>
+        </p:style>
+        <p:txBody>
+          <a:bodyPr rtlCol="0" anchor="ctr"/>
+          <a:lstStyle/>
+          <a:p>
+            <a:pPr algn="ctr"/>
+          </a:p>
+        </p:txBody>
+      </p:sp>
+      <p:sp>
+        <p:nvSpPr>
+          <p:cNvPr id="22" name="TextBox 21"/>
+          <p:cNvSpPr txBox="1"/>
+          <p:nvPr/>
+        </p:nvSpPr>
+        <p:spPr>
+          <a:xfrm>
+            <a:off x="6812280" y="822960"/>
             <a:ext cx="1965960" cy="548640"/>
           </a:xfrm>
           <a:prstGeom prst="rect">
@@ -3246,36 +4471,37 @@
           <a:noFill/>
         </p:spPr>
         <p:txBody>
-          <a:bodyPr wrap="square" lIns="0" tIns="0" rIns="0" bIns="0" rtlCol="0" anchor="ctr"/>
-          <a:lstStyle/>
-          <a:p>
-            <a:pPr marL="0" indent="0" algn="ctr">
-              <a:buNone/>
-            </a:pPr>
-            <a:r>
-              <a:rPr lang="en-US" sz="2800" b="1" dirty="0">
-                <a:solidFill>
-                  <a:srgbClr val="00B4A6"/>
-                </a:solidFill>
-                <a:latin typeface="Calibri" pitchFamily="34" charset="0"/>
-                <a:ea typeface="Calibri" pitchFamily="34" charset="-122"/>
-                <a:cs typeface="Calibri" pitchFamily="34" charset="-120"/>
-              </a:rPr>
-              <a:t>~25 мс</a:t>
-            </a:r>
-            <a:endParaRPr lang="en-US" sz="2800" dirty="0"/>
-          </a:p>
-        </p:txBody>
-      </p:sp>
-      <p:sp>
-        <p:nvSpPr>
-          <p:cNvPr id="22" name="Text 20"/>
-          <p:cNvSpPr/>
-          <p:nvPr/>
-        </p:nvSpPr>
-        <p:spPr>
-          <a:xfrm>
-            <a:off x="6812280" y="2404872"/>
+          <a:bodyPr wrap="none">
+            <a:spAutoFit/>
+          </a:bodyPr>
+          <a:lstStyle/>
+          <a:p>
+            <a:pPr algn="ctr"/>
+            <a:r>
+              <a:rPr sz="2800" b="1">
+                <a:solidFill>
+                  <a:srgbClr val="EF4444"/>
+                </a:solidFill>
+              </a:rPr>
+              <a:t>12.5 с</a:t>
+            </a:r>
+            <a:endParaRPr sz="2800" b="1">
+              <a:solidFill>
+                <a:srgbClr val="EF4444"/>
+              </a:solidFill>
+            </a:endParaRPr>
+          </a:p>
+        </p:txBody>
+      </p:sp>
+      <p:sp>
+        <p:nvSpPr>
+          <p:cNvPr id="23" name="TextBox 22"/>
+          <p:cNvSpPr txBox="1"/>
+          <p:nvPr/>
+        </p:nvSpPr>
+        <p:spPr>
+          <a:xfrm>
+            <a:off x="6812280" y="1399032"/>
             <a:ext cx="1965960" cy="320040"/>
           </a:xfrm>
           <a:prstGeom prst="rect">
@@ -3284,151 +4510,115 @@
           <a:noFill/>
         </p:spPr>
         <p:txBody>
-          <a:bodyPr wrap="square" lIns="0" tIns="0" rIns="0" bIns="0" rtlCol="0" anchor="ctr"/>
-          <a:lstStyle/>
-          <a:p>
-            <a:pPr marL="0" indent="0" algn="ctr">
-              <a:buNone/>
-            </a:pPr>
-            <a:r>
-              <a:rPr lang="en-US" sz="1100" dirty="0">
+          <a:bodyPr wrap="none">
+            <a:spAutoFit/>
+          </a:bodyPr>
+          <a:lstStyle/>
+          <a:p>
+            <a:pPr algn="ctr"/>
+            <a:r>
+              <a:rPr sz="1000" b="0">
                 <a:solidFill>
                   <a:srgbClr val="6B7280"/>
                 </a:solidFill>
-                <a:latin typeface="Calibri" pitchFamily="34" charset="0"/>
-                <a:ea typeface="Calibri" pitchFamily="34" charset="-122"/>
-                <a:cs typeface="Calibri" pitchFamily="34" charset="-120"/>
-              </a:rPr>
-              <a:t>отклик POST</a:t>
-            </a:r>
-            <a:endParaRPr lang="en-US" sz="1100" dirty="0"/>
-          </a:p>
-        </p:txBody>
-      </p:sp>
-      <p:sp>
-        <p:nvSpPr>
-          <p:cNvPr id="23" name="Text 21"/>
-          <p:cNvSpPr/>
-          <p:nvPr/>
-        </p:nvSpPr>
-        <p:spPr>
-          <a:xfrm>
-            <a:off x="365760" y="2926080"/>
-            <a:ext cx="8412480" cy="274320"/>
-          </a:xfrm>
-          <a:prstGeom prst="rect">
-            <a:avLst/>
-          </a:prstGeom>
-          <a:noFill/>
-        </p:spPr>
-        <p:txBody>
-          <a:bodyPr wrap="square" lIns="0" tIns="0" rIns="0" bIns="0" rtlCol="0" anchor="ctr"/>
-          <a:lstStyle/>
-          <a:p>
-            <a:pPr marL="0" indent="0">
-              <a:buNone/>
-            </a:pPr>
-            <a:r>
-              <a:rPr lang="en-US" sz="1400" b="1" dirty="0">
+              </a:rPr>
+              <a:t>TTFT avg</a:t>
+            </a:r>
+            <a:endParaRPr sz="1000" b="0">
+              <a:solidFill>
+                <a:srgbClr val="6B7280"/>
+              </a:solidFill>
+            </a:endParaRPr>
+          </a:p>
+        </p:txBody>
+      </p:sp>
+      <p:sp>
+        <p:nvSpPr>
+          <p:cNvPr id="24" name="TextBox 23"/>
+          <p:cNvSpPr txBox="1"/>
+          <p:nvPr/>
+        </p:nvSpPr>
+        <p:spPr>
+          <a:xfrm>
+            <a:off x="365760" y="1920000"/>
+            <a:ext cx="8412480" cy="228600"/>
+          </a:xfrm>
+          <a:prstGeom prst="rect">
+            <a:avLst/>
+          </a:prstGeom>
+          <a:noFill/>
+        </p:spPr>
+        <p:txBody>
+          <a:bodyPr wrap="none">
+            <a:spAutoFit/>
+          </a:bodyPr>
+          <a:lstStyle/>
+          <a:p>
+            <a:pPr algn="l"/>
+            <a:r>
+              <a:rPr sz="1400" b="1">
                 <a:solidFill>
                   <a:srgbClr val="0F2A4A"/>
                 </a:solidFill>
-                <a:latin typeface="Calibri" pitchFamily="34" charset="0"/>
-                <a:ea typeface="Calibri" pitchFamily="34" charset="-122"/>
-                <a:cs typeface="Calibri" pitchFamily="34" charset="-120"/>
-              </a:rPr>
-              <a:t>Производительность</a:t>
-            </a:r>
-            <a:endParaRPr lang="en-US" sz="1400" dirty="0"/>
+              </a:rPr>
+              <a:t>По категориям</a:t>
+            </a:r>
+            <a:endParaRPr sz="1400" b="1">
+              <a:solidFill>
+                <a:srgbClr val="0F2A4A"/>
+              </a:solidFill>
+            </a:endParaRPr>
           </a:p>
         </p:txBody>
       </p:sp>
       <p:graphicFrame>
         <p:nvGraphicFramePr>
-          <p:cNvPr id="24" name="Table 0"/>
+          <p:cNvPr id="25" name="Table 24"/>
           <p:cNvGraphicFramePr>
             <a:graphicFrameLocks noGrp="1"/>
           </p:cNvGraphicFramePr>
           <p:nvPr/>
         </p:nvGraphicFramePr>
         <p:xfrm>
-          <a:off x="365760" y="3246120"/>
-          <a:ext cx="8412480" cy="1463040"/>
+          <a:off x="365760" y="2150000"/>
+          <a:ext cx="8412480" cy="1828800"/>
         </p:xfrm>
         <a:graphic>
           <a:graphicData uri="http://schemas.openxmlformats.org/drawingml/2006/table">
             <a:tbl>
-              <a:tblPr/>
+              <a:tblPr firstRow="1" bandRow="1">
+                <a:tableStyleId>{5C22544A-7EE6-4342-B048-85BDC9FD1C3A}</a:tableStyleId>
+              </a:tblPr>
               <a:tblGrid>
-                <a:gridCol w="3657600"/>
-                <a:gridCol w="1554480"/>
-                <a:gridCol w="1554480"/>
-                <a:gridCol w="1645920"/>
+                <a:gridCol w="2743200"/>
+                <a:gridCol w="548640"/>
+                <a:gridCol w="1371600"/>
+                <a:gridCol w="1371600"/>
+                <a:gridCol w="2377440"/>
               </a:tblGrid>
-              <a:tr h="292608">
+              <a:tr h="304800">
                 <a:tc>
                   <a:txBody>
                     <a:bodyPr/>
                     <a:lstStyle/>
                     <a:p>
-                      <a:pPr marL="0" indent="0" algn="ctr">
-                        <a:buNone/>
-                      </a:pPr>
+                      <a:pPr algn="l"/>
                       <a:r>
-                        <a:rPr lang="en-US" sz="1100" b="1" dirty="0">
+                        <a:rPr sz="950" b="1">
                           <a:solidFill>
                             <a:srgbClr val="FFFFFF"/>
                           </a:solidFill>
-                          <a:latin typeface="Calibri" pitchFamily="34" charset="0"/>
-                          <a:ea typeface="Calibri" pitchFamily="34" charset="-122"/>
-                          <a:cs typeface="Calibri" pitchFamily="34" charset="-120"/>
                         </a:rPr>
-                        <a:t>Операция</a:t>
+                        <a:t>Категория</a:t>
                       </a:r>
-                      <a:endParaRPr lang="en-US" sz="1100" dirty="0">
-                        <a:latin typeface="Calibri" pitchFamily="34" charset="0"/>
-                        <a:ea typeface="Calibri" pitchFamily="34" charset="0"/>
-                        <a:cs typeface="Calibri" pitchFamily="34" charset="0"/>
+                      <a:endParaRPr sz="950" b="1">
+                        <a:solidFill>
+                          <a:srgbClr val="FFFFFF"/>
+                        </a:solidFill>
                       </a:endParaRPr>
                     </a:p>
                   </a:txBody>
-                  <a:tcPr anchor="ctr">
-                    <a:lnL w="6350" cap="flat" cmpd="sng" algn="ctr">
-                      <a:solidFill>
-                        <a:srgbClr val="D1D5DB"/>
-                      </a:solidFill>
-                      <a:prstDash val="solid"/>
-                      <a:round/>
-                      <a:headEnd type="none" w="med" len="med"/>
-                      <a:tailEnd type="none" w="med" len="med"/>
-                    </a:lnL>
-                    <a:lnR w="6350" cap="flat" cmpd="sng" algn="ctr">
-                      <a:solidFill>
-                        <a:srgbClr val="D1D5DB"/>
-                      </a:solidFill>
-                      <a:prstDash val="solid"/>
-                      <a:round/>
-                      <a:headEnd type="none" w="med" len="med"/>
-                      <a:tailEnd type="none" w="med" len="med"/>
-                    </a:lnR>
-                    <a:lnT w="6350" cap="flat" cmpd="sng" algn="ctr">
-                      <a:solidFill>
-                        <a:srgbClr val="D1D5DB"/>
-                      </a:solidFill>
-                      <a:prstDash val="solid"/>
-                      <a:round/>
-                      <a:headEnd type="none" w="med" len="med"/>
-                      <a:tailEnd type="none" w="med" len="med"/>
-                    </a:lnT>
-                    <a:lnB w="6350" cap="flat" cmpd="sng" algn="ctr">
-                      <a:solidFill>
-                        <a:srgbClr val="D1D5DB"/>
-                      </a:solidFill>
-                      <a:prstDash val="solid"/>
-                      <a:round/>
-                      <a:headEnd type="none" w="med" len="med"/>
-                      <a:tailEnd type="none" w="med" len="med"/>
-                    </a:lnB>
+                  <a:tcPr>
                     <a:solidFill>
                       <a:srgbClr val="0F2A4A"/>
                     </a:solidFill>
@@ -3439,64 +4629,23 @@
                     <a:bodyPr/>
                     <a:lstStyle/>
                     <a:p>
-                      <a:pPr marL="0" indent="0" algn="ctr">
-                        <a:buNone/>
-                      </a:pPr>
+                      <a:pPr algn="ctr"/>
                       <a:r>
-                        <a:rPr lang="en-US" sz="1100" b="1" dirty="0">
+                        <a:rPr sz="950" b="1">
                           <a:solidFill>
                             <a:srgbClr val="FFFFFF"/>
                           </a:solidFill>
-                          <a:latin typeface="Calibri" pitchFamily="34" charset="0"/>
-                          <a:ea typeface="Calibri" pitchFamily="34" charset="-122"/>
-                          <a:cs typeface="Calibri" pitchFamily="34" charset="-120"/>
                         </a:rPr>
-                        <a:t>Среднее</a:t>
+                        <a:t>N</a:t>
                       </a:r>
-                      <a:endParaRPr lang="en-US" sz="1100" dirty="0">
-                        <a:latin typeface="Calibri" pitchFamily="34" charset="0"/>
-                        <a:ea typeface="Calibri" pitchFamily="34" charset="0"/>
-                        <a:cs typeface="Calibri" pitchFamily="34" charset="0"/>
+                      <a:endParaRPr sz="950" b="1">
+                        <a:solidFill>
+                          <a:srgbClr val="FFFFFF"/>
+                        </a:solidFill>
                       </a:endParaRPr>
                     </a:p>
                   </a:txBody>
-                  <a:tcPr anchor="ctr">
-                    <a:lnL w="6350" cap="flat" cmpd="sng" algn="ctr">
-                      <a:solidFill>
-                        <a:srgbClr val="D1D5DB"/>
-                      </a:solidFill>
-                      <a:prstDash val="solid"/>
-                      <a:round/>
-                      <a:headEnd type="none" w="med" len="med"/>
-                      <a:tailEnd type="none" w="med" len="med"/>
-                    </a:lnL>
-                    <a:lnR w="6350" cap="flat" cmpd="sng" algn="ctr">
-                      <a:solidFill>
-                        <a:srgbClr val="D1D5DB"/>
-                      </a:solidFill>
-                      <a:prstDash val="solid"/>
-                      <a:round/>
-                      <a:headEnd type="none" w="med" len="med"/>
-                      <a:tailEnd type="none" w="med" len="med"/>
-                    </a:lnR>
-                    <a:lnT w="6350" cap="flat" cmpd="sng" algn="ctr">
-                      <a:solidFill>
-                        <a:srgbClr val="D1D5DB"/>
-                      </a:solidFill>
-                      <a:prstDash val="solid"/>
-                      <a:round/>
-                      <a:headEnd type="none" w="med" len="med"/>
-                      <a:tailEnd type="none" w="med" len="med"/>
-                    </a:lnT>
-                    <a:lnB w="6350" cap="flat" cmpd="sng" algn="ctr">
-                      <a:solidFill>
-                        <a:srgbClr val="D1D5DB"/>
-                      </a:solidFill>
-                      <a:prstDash val="solid"/>
-                      <a:round/>
-                      <a:headEnd type="none" w="med" len="med"/>
-                      <a:tailEnd type="none" w="med" len="med"/>
-                    </a:lnB>
+                  <a:tcPr>
                     <a:solidFill>
                       <a:srgbClr val="0F2A4A"/>
                     </a:solidFill>
@@ -3507,64 +4656,23 @@
                     <a:bodyPr/>
                     <a:lstStyle/>
                     <a:p>
-                      <a:pPr marL="0" indent="0" algn="ctr">
-                        <a:buNone/>
-                      </a:pPr>
+                      <a:pPr algn="ctr"/>
                       <a:r>
-                        <a:rPr lang="en-US" sz="1100" b="1" dirty="0">
+                        <a:rPr sz="950" b="1">
                           <a:solidFill>
                             <a:srgbClr val="FFFFFF"/>
                           </a:solidFill>
-                          <a:latin typeface="Calibri" pitchFamily="34" charset="0"/>
-                          <a:ea typeface="Calibri" pitchFamily="34" charset="-122"/>
-                          <a:cs typeface="Calibri" pitchFamily="34" charset="-120"/>
                         </a:rPr>
-                        <a:t>Мин</a:t>
+                        <a:t>Factual</a:t>
                       </a:r>
-                      <a:endParaRPr lang="en-US" sz="1100" dirty="0">
-                        <a:latin typeface="Calibri" pitchFamily="34" charset="0"/>
-                        <a:ea typeface="Calibri" pitchFamily="34" charset="0"/>
-                        <a:cs typeface="Calibri" pitchFamily="34" charset="0"/>
+                      <a:endParaRPr sz="950" b="1">
+                        <a:solidFill>
+                          <a:srgbClr val="FFFFFF"/>
+                        </a:solidFill>
                       </a:endParaRPr>
                     </a:p>
                   </a:txBody>
-                  <a:tcPr anchor="ctr">
-                    <a:lnL w="6350" cap="flat" cmpd="sng" algn="ctr">
-                      <a:solidFill>
-                        <a:srgbClr val="D1D5DB"/>
-                      </a:solidFill>
-                      <a:prstDash val="solid"/>
-                      <a:round/>
-                      <a:headEnd type="none" w="med" len="med"/>
-                      <a:tailEnd type="none" w="med" len="med"/>
-                    </a:lnL>
-                    <a:lnR w="6350" cap="flat" cmpd="sng" algn="ctr">
-                      <a:solidFill>
-                        <a:srgbClr val="D1D5DB"/>
-                      </a:solidFill>
-                      <a:prstDash val="solid"/>
-                      <a:round/>
-                      <a:headEnd type="none" w="med" len="med"/>
-                      <a:tailEnd type="none" w="med" len="med"/>
-                    </a:lnR>
-                    <a:lnT w="6350" cap="flat" cmpd="sng" algn="ctr">
-                      <a:solidFill>
-                        <a:srgbClr val="D1D5DB"/>
-                      </a:solidFill>
-                      <a:prstDash val="solid"/>
-                      <a:round/>
-                      <a:headEnd type="none" w="med" len="med"/>
-                      <a:tailEnd type="none" w="med" len="med"/>
-                    </a:lnT>
-                    <a:lnB w="6350" cap="flat" cmpd="sng" algn="ctr">
-                      <a:solidFill>
-                        <a:srgbClr val="D1D5DB"/>
-                      </a:solidFill>
-                      <a:prstDash val="solid"/>
-                      <a:round/>
-                      <a:headEnd type="none" w="med" len="med"/>
-                      <a:tailEnd type="none" w="med" len="med"/>
-                    </a:lnB>
+                  <a:tcPr>
                     <a:solidFill>
                       <a:srgbClr val="0F2A4A"/>
                     </a:solidFill>
@@ -3575,134 +4683,26 @@
                     <a:bodyPr/>
                     <a:lstStyle/>
                     <a:p>
-                      <a:pPr marL="0" indent="0" algn="ctr">
-                        <a:buNone/>
-                      </a:pPr>
+                      <a:pPr algn="ctr"/>
                       <a:r>
-                        <a:rPr lang="en-US" sz="1100" b="1" dirty="0">
+                        <a:rPr sz="950" b="1">
                           <a:solidFill>
                             <a:srgbClr val="FFFFFF"/>
                           </a:solidFill>
-                          <a:latin typeface="Calibri" pitchFamily="34" charset="0"/>
-                          <a:ea typeface="Calibri" pitchFamily="34" charset="-122"/>
-                          <a:cs typeface="Calibri" pitchFamily="34" charset="-120"/>
                         </a:rPr>
-                        <a:t>Макс</a:t>
+                        <a:t>Recall@10</a:t>
                       </a:r>
-                      <a:endParaRPr lang="en-US" sz="1100" dirty="0">
-                        <a:latin typeface="Calibri" pitchFamily="34" charset="0"/>
-                        <a:ea typeface="Calibri" pitchFamily="34" charset="0"/>
-                        <a:cs typeface="Calibri" pitchFamily="34" charset="0"/>
+                      <a:endParaRPr sz="950" b="1">
+                        <a:solidFill>
+                          <a:srgbClr val="FFFFFF"/>
+                        </a:solidFill>
                       </a:endParaRPr>
                     </a:p>
                   </a:txBody>
-                  <a:tcPr anchor="ctr">
-                    <a:lnL w="6350" cap="flat" cmpd="sng" algn="ctr">
-                      <a:solidFill>
-                        <a:srgbClr val="D1D5DB"/>
-                      </a:solidFill>
-                      <a:prstDash val="solid"/>
-                      <a:round/>
-                      <a:headEnd type="none" w="med" len="med"/>
-                      <a:tailEnd type="none" w="med" len="med"/>
-                    </a:lnL>
-                    <a:lnR w="6350" cap="flat" cmpd="sng" algn="ctr">
-                      <a:solidFill>
-                        <a:srgbClr val="D1D5DB"/>
-                      </a:solidFill>
-                      <a:prstDash val="solid"/>
-                      <a:round/>
-                      <a:headEnd type="none" w="med" len="med"/>
-                      <a:tailEnd type="none" w="med" len="med"/>
-                    </a:lnR>
-                    <a:lnT w="6350" cap="flat" cmpd="sng" algn="ctr">
-                      <a:solidFill>
-                        <a:srgbClr val="D1D5DB"/>
-                      </a:solidFill>
-                      <a:prstDash val="solid"/>
-                      <a:round/>
-                      <a:headEnd type="none" w="med" len="med"/>
-                      <a:tailEnd type="none" w="med" len="med"/>
-                    </a:lnT>
-                    <a:lnB w="6350" cap="flat" cmpd="sng" algn="ctr">
-                      <a:solidFill>
-                        <a:srgbClr val="D1D5DB"/>
-                      </a:solidFill>
-                      <a:prstDash val="solid"/>
-                      <a:round/>
-                      <a:headEnd type="none" w="med" len="med"/>
-                      <a:tailEnd type="none" w="med" len="med"/>
-                    </a:lnB>
+                  <a:tcPr>
                     <a:solidFill>
                       <a:srgbClr val="0F2A4A"/>
                     </a:solidFill>
-                  </a:tcPr>
-                </a:tc>
-              </a:tr>
-              <a:tr h="292608">
-                <a:tc>
-                  <a:txBody>
-                    <a:bodyPr/>
-                    <a:lstStyle/>
-                    <a:p>
-                      <a:pPr marL="0" indent="0" algn="ctr">
-                        <a:buNone/>
-                      </a:pPr>
-                      <a:r>
-                        <a:rPr lang="en-US" sz="1100" dirty="0">
-                          <a:solidFill>
-                            <a:srgbClr val="1F2937"/>
-                          </a:solidFill>
-                          <a:latin typeface="Calibri" pitchFamily="34" charset="0"/>
-                          <a:ea typeface="Calibri" pitchFamily="34" charset="-122"/>
-                          <a:cs typeface="Calibri" pitchFamily="34" charset="-120"/>
-                        </a:rPr>
-                        <a:t>Регистрация задачи</a:t>
-                      </a:r>
-                      <a:endParaRPr lang="en-US" sz="1100" dirty="0">
-                        <a:latin typeface="Calibri" pitchFamily="34" charset="0"/>
-                        <a:ea typeface="Calibri" pitchFamily="34" charset="0"/>
-                        <a:cs typeface="Calibri" pitchFamily="34" charset="0"/>
-                      </a:endParaRPr>
-                    </a:p>
-                  </a:txBody>
-                  <a:tcPr anchor="ctr">
-                    <a:lnL w="6350" cap="flat" cmpd="sng" algn="ctr">
-                      <a:solidFill>
-                        <a:srgbClr val="D1D5DB"/>
-                      </a:solidFill>
-                      <a:prstDash val="solid"/>
-                      <a:round/>
-                      <a:headEnd type="none" w="med" len="med"/>
-                      <a:tailEnd type="none" w="med" len="med"/>
-                    </a:lnL>
-                    <a:lnR w="6350" cap="flat" cmpd="sng" algn="ctr">
-                      <a:solidFill>
-                        <a:srgbClr val="D1D5DB"/>
-                      </a:solidFill>
-                      <a:prstDash val="solid"/>
-                      <a:round/>
-                      <a:headEnd type="none" w="med" len="med"/>
-                      <a:tailEnd type="none" w="med" len="med"/>
-                    </a:lnR>
-                    <a:lnT w="6350" cap="flat" cmpd="sng" algn="ctr">
-                      <a:solidFill>
-                        <a:srgbClr val="D1D5DB"/>
-                      </a:solidFill>
-                      <a:prstDash val="solid"/>
-                      <a:round/>
-                      <a:headEnd type="none" w="med" len="med"/>
-                      <a:tailEnd type="none" w="med" len="med"/>
-                    </a:lnT>
-                    <a:lnB w="6350" cap="flat" cmpd="sng" algn="ctr">
-                      <a:solidFill>
-                        <a:srgbClr val="D1D5DB"/>
-                      </a:solidFill>
-                      <a:prstDash val="solid"/>
-                      <a:round/>
-                      <a:headEnd type="none" w="med" len="med"/>
-                      <a:tailEnd type="none" w="med" len="med"/>
-                    </a:lnB>
                   </a:tcPr>
                 </a:tc>
                 <a:tc>
@@ -3710,64 +4710,55 @@
                     <a:bodyPr/>
                     <a:lstStyle/>
                     <a:p>
-                      <a:pPr marL="0" indent="0" algn="ctr">
-                        <a:buNone/>
-                      </a:pPr>
+                      <a:pPr algn="ctr"/>
                       <a:r>
-                        <a:rPr lang="en-US" sz="1100" dirty="0">
+                        <a:rPr sz="950" b="1">
+                          <a:solidFill>
+                            <a:srgbClr val="FFFFFF"/>
+                          </a:solidFill>
+                        </a:rPr>
+                        <a:t>Hall.</a:t>
+                      </a:r>
+                      <a:endParaRPr sz="950" b="1">
+                        <a:solidFill>
+                          <a:srgbClr val="FFFFFF"/>
+                        </a:solidFill>
+                      </a:endParaRPr>
+                    </a:p>
+                  </a:txBody>
+                  <a:tcPr>
+                    <a:solidFill>
+                      <a:srgbClr val="0F2A4A"/>
+                    </a:solidFill>
+                  </a:tcPr>
+                </a:tc>
+              </a:tr>
+              <a:tr h="304800">
+                <a:tc>
+                  <a:txBody>
+                    <a:bodyPr/>
+                    <a:lstStyle/>
+                    <a:p>
+                      <a:pPr algn="l"/>
+                      <a:r>
+                        <a:rPr sz="950" b="0">
                           <a:solidFill>
                             <a:srgbClr val="1F2937"/>
                           </a:solidFill>
-                          <a:latin typeface="Calibri" pitchFamily="34" charset="0"/>
-                          <a:ea typeface="Calibri" pitchFamily="34" charset="-122"/>
-                          <a:cs typeface="Calibri" pitchFamily="34" charset="-120"/>
                         </a:rPr>
-                        <a:t>24 мс</a:t>
+                        <a:t>small_talk</a:t>
                       </a:r>
-                      <a:endParaRPr lang="en-US" sz="1100" dirty="0">
-                        <a:latin typeface="Calibri" pitchFamily="34" charset="0"/>
-                        <a:ea typeface="Calibri" pitchFamily="34" charset="0"/>
-                        <a:cs typeface="Calibri" pitchFamily="34" charset="0"/>
+                      <a:endParaRPr sz="950" b="0">
+                        <a:solidFill>
+                          <a:srgbClr val="1F2937"/>
+                        </a:solidFill>
                       </a:endParaRPr>
                     </a:p>
                   </a:txBody>
-                  <a:tcPr anchor="ctr">
-                    <a:lnL w="6350" cap="flat" cmpd="sng" algn="ctr">
-                      <a:solidFill>
-                        <a:srgbClr val="D1D5DB"/>
-                      </a:solidFill>
-                      <a:prstDash val="solid"/>
-                      <a:round/>
-                      <a:headEnd type="none" w="med" len="med"/>
-                      <a:tailEnd type="none" w="med" len="med"/>
-                    </a:lnL>
-                    <a:lnR w="6350" cap="flat" cmpd="sng" algn="ctr">
-                      <a:solidFill>
-                        <a:srgbClr val="D1D5DB"/>
-                      </a:solidFill>
-                      <a:prstDash val="solid"/>
-                      <a:round/>
-                      <a:headEnd type="none" w="med" len="med"/>
-                      <a:tailEnd type="none" w="med" len="med"/>
-                    </a:lnR>
-                    <a:lnT w="6350" cap="flat" cmpd="sng" algn="ctr">
-                      <a:solidFill>
-                        <a:srgbClr val="D1D5DB"/>
-                      </a:solidFill>
-                      <a:prstDash val="solid"/>
-                      <a:round/>
-                      <a:headEnd type="none" w="med" len="med"/>
-                      <a:tailEnd type="none" w="med" len="med"/>
-                    </a:lnT>
-                    <a:lnB w="6350" cap="flat" cmpd="sng" algn="ctr">
-                      <a:solidFill>
-                        <a:srgbClr val="D1D5DB"/>
-                      </a:solidFill>
-                      <a:prstDash val="solid"/>
-                      <a:round/>
-                      <a:headEnd type="none" w="med" len="med"/>
-                      <a:tailEnd type="none" w="med" len="med"/>
-                    </a:lnB>
+                  <a:tcPr>
+                    <a:solidFill>
+                      <a:srgbClr val="FFFFFF"/>
+                    </a:solidFill>
                   </a:tcPr>
                 </a:tc>
                 <a:tc>
@@ -3775,64 +4766,26 @@
                     <a:bodyPr/>
                     <a:lstStyle/>
                     <a:p>
-                      <a:pPr marL="0" indent="0" algn="ctr">
-                        <a:buNone/>
-                      </a:pPr>
+                      <a:pPr algn="ctr"/>
                       <a:r>
-                        <a:rPr lang="en-US" sz="1100" dirty="0">
+                        <a:rPr sz="950" b="0">
                           <a:solidFill>
                             <a:srgbClr val="1F2937"/>
                           </a:solidFill>
-                          <a:latin typeface="Calibri" pitchFamily="34" charset="0"/>
-                          <a:ea typeface="Calibri" pitchFamily="34" charset="-122"/>
-                          <a:cs typeface="Calibri" pitchFamily="34" charset="-120"/>
                         </a:rPr>
-                        <a:t>11 мс</a:t>
+                        <a:t>5</a:t>
                       </a:r>
-                      <a:endParaRPr lang="en-US" sz="1100" dirty="0">
-                        <a:latin typeface="Calibri" pitchFamily="34" charset="0"/>
-                        <a:ea typeface="Calibri" pitchFamily="34" charset="0"/>
-                        <a:cs typeface="Calibri" pitchFamily="34" charset="0"/>
+                      <a:endParaRPr sz="950" b="0">
+                        <a:solidFill>
+                          <a:srgbClr val="1F2937"/>
+                        </a:solidFill>
                       </a:endParaRPr>
                     </a:p>
                   </a:txBody>
-                  <a:tcPr anchor="ctr">
-                    <a:lnL w="6350" cap="flat" cmpd="sng" algn="ctr">
-                      <a:solidFill>
-                        <a:srgbClr val="D1D5DB"/>
-                      </a:solidFill>
-                      <a:prstDash val="solid"/>
-                      <a:round/>
-                      <a:headEnd type="none" w="med" len="med"/>
-                      <a:tailEnd type="none" w="med" len="med"/>
-                    </a:lnL>
-                    <a:lnR w="6350" cap="flat" cmpd="sng" algn="ctr">
-                      <a:solidFill>
-                        <a:srgbClr val="D1D5DB"/>
-                      </a:solidFill>
-                      <a:prstDash val="solid"/>
-                      <a:round/>
-                      <a:headEnd type="none" w="med" len="med"/>
-                      <a:tailEnd type="none" w="med" len="med"/>
-                    </a:lnR>
-                    <a:lnT w="6350" cap="flat" cmpd="sng" algn="ctr">
-                      <a:solidFill>
-                        <a:srgbClr val="D1D5DB"/>
-                      </a:solidFill>
-                      <a:prstDash val="solid"/>
-                      <a:round/>
-                      <a:headEnd type="none" w="med" len="med"/>
-                      <a:tailEnd type="none" w="med" len="med"/>
-                    </a:lnT>
-                    <a:lnB w="6350" cap="flat" cmpd="sng" algn="ctr">
-                      <a:solidFill>
-                        <a:srgbClr val="D1D5DB"/>
-                      </a:solidFill>
-                      <a:prstDash val="solid"/>
-                      <a:round/>
-                      <a:headEnd type="none" w="med" len="med"/>
-                      <a:tailEnd type="none" w="med" len="med"/>
-                    </a:lnB>
+                  <a:tcPr>
+                    <a:solidFill>
+                      <a:srgbClr val="FFFFFF"/>
+                    </a:solidFill>
                   </a:tcPr>
                 </a:tc>
                 <a:tc>
@@ -3840,131 +4793,26 @@
                     <a:bodyPr/>
                     <a:lstStyle/>
                     <a:p>
-                      <a:pPr marL="0" indent="0" algn="ctr">
-                        <a:buNone/>
-                      </a:pPr>
+                      <a:pPr algn="ctr"/>
                       <a:r>
-                        <a:rPr lang="en-US" sz="1100" dirty="0">
+                        <a:rPr sz="950" b="0">
                           <a:solidFill>
                             <a:srgbClr val="1F2937"/>
                           </a:solidFill>
-                          <a:latin typeface="Calibri" pitchFamily="34" charset="0"/>
-                          <a:ea typeface="Calibri" pitchFamily="34" charset="-122"/>
-                          <a:cs typeface="Calibri" pitchFamily="34" charset="-120"/>
                         </a:rPr>
-                        <a:t>78 мс</a:t>
+                        <a:t>1.00</a:t>
                       </a:r>
-                      <a:endParaRPr lang="en-US" sz="1100" dirty="0">
-                        <a:latin typeface="Calibri" pitchFamily="34" charset="0"/>
-                        <a:ea typeface="Calibri" pitchFamily="34" charset="0"/>
-                        <a:cs typeface="Calibri" pitchFamily="34" charset="0"/>
+                      <a:endParaRPr sz="950" b="0">
+                        <a:solidFill>
+                          <a:srgbClr val="1F2937"/>
+                        </a:solidFill>
                       </a:endParaRPr>
                     </a:p>
                   </a:txBody>
-                  <a:tcPr anchor="ctr">
-                    <a:lnL w="6350" cap="flat" cmpd="sng" algn="ctr">
-                      <a:solidFill>
-                        <a:srgbClr val="D1D5DB"/>
-                      </a:solidFill>
-                      <a:prstDash val="solid"/>
-                      <a:round/>
-                      <a:headEnd type="none" w="med" len="med"/>
-                      <a:tailEnd type="none" w="med" len="med"/>
-                    </a:lnL>
-                    <a:lnR w="6350" cap="flat" cmpd="sng" algn="ctr">
-                      <a:solidFill>
-                        <a:srgbClr val="D1D5DB"/>
-                      </a:solidFill>
-                      <a:prstDash val="solid"/>
-                      <a:round/>
-                      <a:headEnd type="none" w="med" len="med"/>
-                      <a:tailEnd type="none" w="med" len="med"/>
-                    </a:lnR>
-                    <a:lnT w="6350" cap="flat" cmpd="sng" algn="ctr">
-                      <a:solidFill>
-                        <a:srgbClr val="D1D5DB"/>
-                      </a:solidFill>
-                      <a:prstDash val="solid"/>
-                      <a:round/>
-                      <a:headEnd type="none" w="med" len="med"/>
-                      <a:tailEnd type="none" w="med" len="med"/>
-                    </a:lnT>
-                    <a:lnB w="6350" cap="flat" cmpd="sng" algn="ctr">
-                      <a:solidFill>
-                        <a:srgbClr val="D1D5DB"/>
-                      </a:solidFill>
-                      <a:prstDash val="solid"/>
-                      <a:round/>
-                      <a:headEnd type="none" w="med" len="med"/>
-                      <a:tailEnd type="none" w="med" len="med"/>
-                    </a:lnB>
-                  </a:tcPr>
-                </a:tc>
-              </a:tr>
-              <a:tr h="292608">
-                <a:tc>
-                  <a:txBody>
-                    <a:bodyPr/>
-                    <a:lstStyle/>
-                    <a:p>
-                      <a:pPr marL="0" indent="0" algn="ctr">
-                        <a:buNone/>
-                      </a:pPr>
-                      <a:r>
-                        <a:rPr lang="en-US" sz="1100" dirty="0">
-                          <a:solidFill>
-                            <a:srgbClr val="1F2937"/>
-                          </a:solidFill>
-                          <a:latin typeface="Calibri" pitchFamily="34" charset="0"/>
-                          <a:ea typeface="Calibri" pitchFamily="34" charset="-122"/>
-                          <a:cs typeface="Calibri" pitchFamily="34" charset="-120"/>
-                        </a:rPr>
-                        <a:t>Время до первого токена</a:t>
-                      </a:r>
-                      <a:endParaRPr lang="en-US" sz="1100" dirty="0">
-                        <a:latin typeface="Calibri" pitchFamily="34" charset="0"/>
-                        <a:ea typeface="Calibri" pitchFamily="34" charset="0"/>
-                        <a:cs typeface="Calibri" pitchFamily="34" charset="0"/>
-                      </a:endParaRPr>
-                    </a:p>
-                  </a:txBody>
-                  <a:tcPr anchor="ctr">
-                    <a:lnL w="6350" cap="flat" cmpd="sng" algn="ctr">
-                      <a:solidFill>
-                        <a:srgbClr val="D1D5DB"/>
-                      </a:solidFill>
-                      <a:prstDash val="solid"/>
-                      <a:round/>
-                      <a:headEnd type="none" w="med" len="med"/>
-                      <a:tailEnd type="none" w="med" len="med"/>
-                    </a:lnL>
-                    <a:lnR w="6350" cap="flat" cmpd="sng" algn="ctr">
-                      <a:solidFill>
-                        <a:srgbClr val="D1D5DB"/>
-                      </a:solidFill>
-                      <a:prstDash val="solid"/>
-                      <a:round/>
-                      <a:headEnd type="none" w="med" len="med"/>
-                      <a:tailEnd type="none" w="med" len="med"/>
-                    </a:lnR>
-                    <a:lnT w="6350" cap="flat" cmpd="sng" algn="ctr">
-                      <a:solidFill>
-                        <a:srgbClr val="D1D5DB"/>
-                      </a:solidFill>
-                      <a:prstDash val="solid"/>
-                      <a:round/>
-                      <a:headEnd type="none" w="med" len="med"/>
-                      <a:tailEnd type="none" w="med" len="med"/>
-                    </a:lnT>
-                    <a:lnB w="6350" cap="flat" cmpd="sng" algn="ctr">
-                      <a:solidFill>
-                        <a:srgbClr val="D1D5DB"/>
-                      </a:solidFill>
-                      <a:prstDash val="solid"/>
-                      <a:round/>
-                      <a:headEnd type="none" w="med" len="med"/>
-                      <a:tailEnd type="none" w="med" len="med"/>
-                    </a:lnB>
+                  <a:tcPr>
+                    <a:solidFill>
+                      <a:srgbClr val="FFFFFF"/>
+                    </a:solidFill>
                   </a:tcPr>
                 </a:tc>
                 <a:tc>
@@ -3972,64 +4820,26 @@
                     <a:bodyPr/>
                     <a:lstStyle/>
                     <a:p>
-                      <a:pPr marL="0" indent="0" algn="ctr">
-                        <a:buNone/>
-                      </a:pPr>
+                      <a:pPr algn="ctr"/>
                       <a:r>
-                        <a:rPr lang="en-US" sz="1100" dirty="0">
+                        <a:rPr sz="950" b="0">
                           <a:solidFill>
                             <a:srgbClr val="1F2937"/>
                           </a:solidFill>
-                          <a:latin typeface="Calibri" pitchFamily="34" charset="0"/>
-                          <a:ea typeface="Calibri" pitchFamily="34" charset="-122"/>
-                          <a:cs typeface="Calibri" pitchFamily="34" charset="-120"/>
                         </a:rPr>
-                        <a:t>6,8 с</a:t>
+                        <a:t>—</a:t>
                       </a:r>
-                      <a:endParaRPr lang="en-US" sz="1100" dirty="0">
-                        <a:latin typeface="Calibri" pitchFamily="34" charset="0"/>
-                        <a:ea typeface="Calibri" pitchFamily="34" charset="0"/>
-                        <a:cs typeface="Calibri" pitchFamily="34" charset="0"/>
+                      <a:endParaRPr sz="950" b="0">
+                        <a:solidFill>
+                          <a:srgbClr val="1F2937"/>
+                        </a:solidFill>
                       </a:endParaRPr>
                     </a:p>
                   </a:txBody>
-                  <a:tcPr anchor="ctr">
-                    <a:lnL w="6350" cap="flat" cmpd="sng" algn="ctr">
-                      <a:solidFill>
-                        <a:srgbClr val="D1D5DB"/>
-                      </a:solidFill>
-                      <a:prstDash val="solid"/>
-                      <a:round/>
-                      <a:headEnd type="none" w="med" len="med"/>
-                      <a:tailEnd type="none" w="med" len="med"/>
-                    </a:lnL>
-                    <a:lnR w="6350" cap="flat" cmpd="sng" algn="ctr">
-                      <a:solidFill>
-                        <a:srgbClr val="D1D5DB"/>
-                      </a:solidFill>
-                      <a:prstDash val="solid"/>
-                      <a:round/>
-                      <a:headEnd type="none" w="med" len="med"/>
-                      <a:tailEnd type="none" w="med" len="med"/>
-                    </a:lnR>
-                    <a:lnT w="6350" cap="flat" cmpd="sng" algn="ctr">
-                      <a:solidFill>
-                        <a:srgbClr val="D1D5DB"/>
-                      </a:solidFill>
-                      <a:prstDash val="solid"/>
-                      <a:round/>
-                      <a:headEnd type="none" w="med" len="med"/>
-                      <a:tailEnd type="none" w="med" len="med"/>
-                    </a:lnT>
-                    <a:lnB w="6350" cap="flat" cmpd="sng" algn="ctr">
-                      <a:solidFill>
-                        <a:srgbClr val="D1D5DB"/>
-                      </a:solidFill>
-                      <a:prstDash val="solid"/>
-                      <a:round/>
-                      <a:headEnd type="none" w="med" len="med"/>
-                      <a:tailEnd type="none" w="med" len="med"/>
-                    </a:lnB>
+                  <a:tcPr>
+                    <a:solidFill>
+                      <a:srgbClr val="FFFFFF"/>
+                    </a:solidFill>
                   </a:tcPr>
                 </a:tc>
                 <a:tc>
@@ -4037,64 +4847,55 @@
                     <a:bodyPr/>
                     <a:lstStyle/>
                     <a:p>
-                      <a:pPr marL="0" indent="0" algn="ctr">
-                        <a:buNone/>
-                      </a:pPr>
+                      <a:pPr algn="ctr"/>
                       <a:r>
-                        <a:rPr lang="en-US" sz="1100" dirty="0">
+                        <a:rPr sz="950" b="0">
                           <a:solidFill>
                             <a:srgbClr val="1F2937"/>
                           </a:solidFill>
-                          <a:latin typeface="Calibri" pitchFamily="34" charset="0"/>
-                          <a:ea typeface="Calibri" pitchFamily="34" charset="-122"/>
-                          <a:cs typeface="Calibri" pitchFamily="34" charset="-120"/>
                         </a:rPr>
-                        <a:t>3,9 с</a:t>
+                        <a:t>0</a:t>
                       </a:r>
-                      <a:endParaRPr lang="en-US" sz="1100" dirty="0">
-                        <a:latin typeface="Calibri" pitchFamily="34" charset="0"/>
-                        <a:ea typeface="Calibri" pitchFamily="34" charset="0"/>
-                        <a:cs typeface="Calibri" pitchFamily="34" charset="0"/>
+                      <a:endParaRPr sz="950" b="0">
+                        <a:solidFill>
+                          <a:srgbClr val="1F2937"/>
+                        </a:solidFill>
                       </a:endParaRPr>
                     </a:p>
                   </a:txBody>
-                  <a:tcPr anchor="ctr">
-                    <a:lnL w="6350" cap="flat" cmpd="sng" algn="ctr">
-                      <a:solidFill>
-                        <a:srgbClr val="D1D5DB"/>
-                      </a:solidFill>
-                      <a:prstDash val="solid"/>
-                      <a:round/>
-                      <a:headEnd type="none" w="med" len="med"/>
-                      <a:tailEnd type="none" w="med" len="med"/>
-                    </a:lnL>
-                    <a:lnR w="6350" cap="flat" cmpd="sng" algn="ctr">
-                      <a:solidFill>
-                        <a:srgbClr val="D1D5DB"/>
-                      </a:solidFill>
-                      <a:prstDash val="solid"/>
-                      <a:round/>
-                      <a:headEnd type="none" w="med" len="med"/>
-                      <a:tailEnd type="none" w="med" len="med"/>
-                    </a:lnR>
-                    <a:lnT w="6350" cap="flat" cmpd="sng" algn="ctr">
-                      <a:solidFill>
-                        <a:srgbClr val="D1D5DB"/>
-                      </a:solidFill>
-                      <a:prstDash val="solid"/>
-                      <a:round/>
-                      <a:headEnd type="none" w="med" len="med"/>
-                      <a:tailEnd type="none" w="med" len="med"/>
-                    </a:lnT>
-                    <a:lnB w="6350" cap="flat" cmpd="sng" algn="ctr">
-                      <a:solidFill>
-                        <a:srgbClr val="D1D5DB"/>
-                      </a:solidFill>
-                      <a:prstDash val="solid"/>
-                      <a:round/>
-                      <a:headEnd type="none" w="med" len="med"/>
-                      <a:tailEnd type="none" w="med" len="med"/>
-                    </a:lnB>
+                  <a:tcPr>
+                    <a:solidFill>
+                      <a:srgbClr val="FFFFFF"/>
+                    </a:solidFill>
+                  </a:tcPr>
+                </a:tc>
+              </a:tr>
+              <a:tr h="304800">
+                <a:tc>
+                  <a:txBody>
+                    <a:bodyPr/>
+                    <a:lstStyle/>
+                    <a:p>
+                      <a:pPr algn="l"/>
+                      <a:r>
+                        <a:rPr sz="950" b="0">
+                          <a:solidFill>
+                            <a:srgbClr val="1F2937"/>
+                          </a:solidFill>
+                        </a:rPr>
+                        <a:t>easy_factual</a:t>
+                      </a:r>
+                      <a:endParaRPr sz="950" b="0">
+                        <a:solidFill>
+                          <a:srgbClr val="1F2937"/>
+                        </a:solidFill>
+                      </a:endParaRPr>
+                    </a:p>
+                  </a:txBody>
+                  <a:tcPr>
+                    <a:solidFill>
+                      <a:srgbClr val="F1F5F9"/>
+                    </a:solidFill>
                   </a:tcPr>
                 </a:tc>
                 <a:tc>
@@ -4102,131 +4903,26 @@
                     <a:bodyPr/>
                     <a:lstStyle/>
                     <a:p>
-                      <a:pPr marL="0" indent="0" algn="ctr">
-                        <a:buNone/>
-                      </a:pPr>
+                      <a:pPr algn="ctr"/>
                       <a:r>
-                        <a:rPr lang="en-US" sz="1100" dirty="0">
+                        <a:rPr sz="950" b="0">
                           <a:solidFill>
                             <a:srgbClr val="1F2937"/>
                           </a:solidFill>
-                          <a:latin typeface="Calibri" pitchFamily="34" charset="0"/>
-                          <a:ea typeface="Calibri" pitchFamily="34" charset="-122"/>
-                          <a:cs typeface="Calibri" pitchFamily="34" charset="-120"/>
                         </a:rPr>
-                        <a:t>12,4 с</a:t>
+                        <a:t>15</a:t>
                       </a:r>
-                      <a:endParaRPr lang="en-US" sz="1100" dirty="0">
-                        <a:latin typeface="Calibri" pitchFamily="34" charset="0"/>
-                        <a:ea typeface="Calibri" pitchFamily="34" charset="0"/>
-                        <a:cs typeface="Calibri" pitchFamily="34" charset="0"/>
+                      <a:endParaRPr sz="950" b="0">
+                        <a:solidFill>
+                          <a:srgbClr val="1F2937"/>
+                        </a:solidFill>
                       </a:endParaRPr>
                     </a:p>
                   </a:txBody>
-                  <a:tcPr anchor="ctr">
-                    <a:lnL w="6350" cap="flat" cmpd="sng" algn="ctr">
-                      <a:solidFill>
-                        <a:srgbClr val="D1D5DB"/>
-                      </a:solidFill>
-                      <a:prstDash val="solid"/>
-                      <a:round/>
-                      <a:headEnd type="none" w="med" len="med"/>
-                      <a:tailEnd type="none" w="med" len="med"/>
-                    </a:lnL>
-                    <a:lnR w="6350" cap="flat" cmpd="sng" algn="ctr">
-                      <a:solidFill>
-                        <a:srgbClr val="D1D5DB"/>
-                      </a:solidFill>
-                      <a:prstDash val="solid"/>
-                      <a:round/>
-                      <a:headEnd type="none" w="med" len="med"/>
-                      <a:tailEnd type="none" w="med" len="med"/>
-                    </a:lnR>
-                    <a:lnT w="6350" cap="flat" cmpd="sng" algn="ctr">
-                      <a:solidFill>
-                        <a:srgbClr val="D1D5DB"/>
-                      </a:solidFill>
-                      <a:prstDash val="solid"/>
-                      <a:round/>
-                      <a:headEnd type="none" w="med" len="med"/>
-                      <a:tailEnd type="none" w="med" len="med"/>
-                    </a:lnT>
-                    <a:lnB w="6350" cap="flat" cmpd="sng" algn="ctr">
-                      <a:solidFill>
-                        <a:srgbClr val="D1D5DB"/>
-                      </a:solidFill>
-                      <a:prstDash val="solid"/>
-                      <a:round/>
-                      <a:headEnd type="none" w="med" len="med"/>
-                      <a:tailEnd type="none" w="med" len="med"/>
-                    </a:lnB>
-                  </a:tcPr>
-                </a:tc>
-              </a:tr>
-              <a:tr h="292608">
-                <a:tc>
-                  <a:txBody>
-                    <a:bodyPr/>
-                    <a:lstStyle/>
-                    <a:p>
-                      <a:pPr marL="0" indent="0" algn="ctr">
-                        <a:buNone/>
-                      </a:pPr>
-                      <a:r>
-                        <a:rPr lang="en-US" sz="1100" dirty="0">
-                          <a:solidFill>
-                            <a:srgbClr val="1F2937"/>
-                          </a:solidFill>
-                          <a:latin typeface="Calibri" pitchFamily="34" charset="0"/>
-                          <a:ea typeface="Calibri" pitchFamily="34" charset="-122"/>
-                          <a:cs typeface="Calibri" pitchFamily="34" charset="-120"/>
-                        </a:rPr>
-                        <a:t>Полная генерация ответа</a:t>
-                      </a:r>
-                      <a:endParaRPr lang="en-US" sz="1100" dirty="0">
-                        <a:latin typeface="Calibri" pitchFamily="34" charset="0"/>
-                        <a:ea typeface="Calibri" pitchFamily="34" charset="0"/>
-                        <a:cs typeface="Calibri" pitchFamily="34" charset="0"/>
-                      </a:endParaRPr>
-                    </a:p>
-                  </a:txBody>
-                  <a:tcPr anchor="ctr">
-                    <a:lnL w="6350" cap="flat" cmpd="sng" algn="ctr">
-                      <a:solidFill>
-                        <a:srgbClr val="D1D5DB"/>
-                      </a:solidFill>
-                      <a:prstDash val="solid"/>
-                      <a:round/>
-                      <a:headEnd type="none" w="med" len="med"/>
-                      <a:tailEnd type="none" w="med" len="med"/>
-                    </a:lnL>
-                    <a:lnR w="6350" cap="flat" cmpd="sng" algn="ctr">
-                      <a:solidFill>
-                        <a:srgbClr val="D1D5DB"/>
-                      </a:solidFill>
-                      <a:prstDash val="solid"/>
-                      <a:round/>
-                      <a:headEnd type="none" w="med" len="med"/>
-                      <a:tailEnd type="none" w="med" len="med"/>
-                    </a:lnR>
-                    <a:lnT w="6350" cap="flat" cmpd="sng" algn="ctr">
-                      <a:solidFill>
-                        <a:srgbClr val="D1D5DB"/>
-                      </a:solidFill>
-                      <a:prstDash val="solid"/>
-                      <a:round/>
-                      <a:headEnd type="none" w="med" len="med"/>
-                      <a:tailEnd type="none" w="med" len="med"/>
-                    </a:lnT>
-                    <a:lnB w="6350" cap="flat" cmpd="sng" algn="ctr">
-                      <a:solidFill>
-                        <a:srgbClr val="D1D5DB"/>
-                      </a:solidFill>
-                      <a:prstDash val="solid"/>
-                      <a:round/>
-                      <a:headEnd type="none" w="med" len="med"/>
-                      <a:tailEnd type="none" w="med" len="med"/>
-                    </a:lnB>
+                  <a:tcPr>
+                    <a:solidFill>
+                      <a:srgbClr val="F1F5F9"/>
+                    </a:solidFill>
                   </a:tcPr>
                 </a:tc>
                 <a:tc>
@@ -4234,64 +4930,26 @@
                     <a:bodyPr/>
                     <a:lstStyle/>
                     <a:p>
-                      <a:pPr marL="0" indent="0" algn="ctr">
-                        <a:buNone/>
-                      </a:pPr>
+                      <a:pPr algn="ctr"/>
                       <a:r>
-                        <a:rPr lang="en-US" sz="1100" dirty="0">
+                        <a:rPr sz="950" b="0">
                           <a:solidFill>
                             <a:srgbClr val="1F2937"/>
                           </a:solidFill>
-                          <a:latin typeface="Calibri" pitchFamily="34" charset="0"/>
-                          <a:ea typeface="Calibri" pitchFamily="34" charset="-122"/>
-                          <a:cs typeface="Calibri" pitchFamily="34" charset="-120"/>
                         </a:rPr>
-                        <a:t>27 с</a:t>
+                        <a:t>1.00</a:t>
                       </a:r>
-                      <a:endParaRPr lang="en-US" sz="1100" dirty="0">
-                        <a:latin typeface="Calibri" pitchFamily="34" charset="0"/>
-                        <a:ea typeface="Calibri" pitchFamily="34" charset="0"/>
-                        <a:cs typeface="Calibri" pitchFamily="34" charset="0"/>
+                      <a:endParaRPr sz="950" b="0">
+                        <a:solidFill>
+                          <a:srgbClr val="1F2937"/>
+                        </a:solidFill>
                       </a:endParaRPr>
                     </a:p>
                   </a:txBody>
-                  <a:tcPr anchor="ctr">
-                    <a:lnL w="6350" cap="flat" cmpd="sng" algn="ctr">
-                      <a:solidFill>
-                        <a:srgbClr val="D1D5DB"/>
-                      </a:solidFill>
-                      <a:prstDash val="solid"/>
-                      <a:round/>
-                      <a:headEnd type="none" w="med" len="med"/>
-                      <a:tailEnd type="none" w="med" len="med"/>
-                    </a:lnL>
-                    <a:lnR w="6350" cap="flat" cmpd="sng" algn="ctr">
-                      <a:solidFill>
-                        <a:srgbClr val="D1D5DB"/>
-                      </a:solidFill>
-                      <a:prstDash val="solid"/>
-                      <a:round/>
-                      <a:headEnd type="none" w="med" len="med"/>
-                      <a:tailEnd type="none" w="med" len="med"/>
-                    </a:lnR>
-                    <a:lnT w="6350" cap="flat" cmpd="sng" algn="ctr">
-                      <a:solidFill>
-                        <a:srgbClr val="D1D5DB"/>
-                      </a:solidFill>
-                      <a:prstDash val="solid"/>
-                      <a:round/>
-                      <a:headEnd type="none" w="med" len="med"/>
-                      <a:tailEnd type="none" w="med" len="med"/>
-                    </a:lnT>
-                    <a:lnB w="6350" cap="flat" cmpd="sng" algn="ctr">
-                      <a:solidFill>
-                        <a:srgbClr val="D1D5DB"/>
-                      </a:solidFill>
-                      <a:prstDash val="solid"/>
-                      <a:round/>
-                      <a:headEnd type="none" w="med" len="med"/>
-                      <a:tailEnd type="none" w="med" len="med"/>
-                    </a:lnB>
+                  <a:tcPr>
+                    <a:solidFill>
+                      <a:srgbClr val="F1F5F9"/>
+                    </a:solidFill>
                   </a:tcPr>
                 </a:tc>
                 <a:tc>
@@ -4299,64 +4957,26 @@
                     <a:bodyPr/>
                     <a:lstStyle/>
                     <a:p>
-                      <a:pPr marL="0" indent="0" algn="ctr">
-                        <a:buNone/>
-                      </a:pPr>
+                      <a:pPr algn="ctr"/>
                       <a:r>
-                        <a:rPr lang="en-US" sz="1100" dirty="0">
+                        <a:rPr sz="950" b="0">
                           <a:solidFill>
                             <a:srgbClr val="1F2937"/>
                           </a:solidFill>
-                          <a:latin typeface="Calibri" pitchFamily="34" charset="0"/>
-                          <a:ea typeface="Calibri" pitchFamily="34" charset="-122"/>
-                          <a:cs typeface="Calibri" pitchFamily="34" charset="-120"/>
                         </a:rPr>
-                        <a:t>13 с</a:t>
+                        <a:t>1.00</a:t>
                       </a:r>
-                      <a:endParaRPr lang="en-US" sz="1100" dirty="0">
-                        <a:latin typeface="Calibri" pitchFamily="34" charset="0"/>
-                        <a:ea typeface="Calibri" pitchFamily="34" charset="0"/>
-                        <a:cs typeface="Calibri" pitchFamily="34" charset="0"/>
+                      <a:endParaRPr sz="950" b="0">
+                        <a:solidFill>
+                          <a:srgbClr val="1F2937"/>
+                        </a:solidFill>
                       </a:endParaRPr>
                     </a:p>
                   </a:txBody>
-                  <a:tcPr anchor="ctr">
-                    <a:lnL w="6350" cap="flat" cmpd="sng" algn="ctr">
-                      <a:solidFill>
-                        <a:srgbClr val="D1D5DB"/>
-                      </a:solidFill>
-                      <a:prstDash val="solid"/>
-                      <a:round/>
-                      <a:headEnd type="none" w="med" len="med"/>
-                      <a:tailEnd type="none" w="med" len="med"/>
-                    </a:lnL>
-                    <a:lnR w="6350" cap="flat" cmpd="sng" algn="ctr">
-                      <a:solidFill>
-                        <a:srgbClr val="D1D5DB"/>
-                      </a:solidFill>
-                      <a:prstDash val="solid"/>
-                      <a:round/>
-                      <a:headEnd type="none" w="med" len="med"/>
-                      <a:tailEnd type="none" w="med" len="med"/>
-                    </a:lnR>
-                    <a:lnT w="6350" cap="flat" cmpd="sng" algn="ctr">
-                      <a:solidFill>
-                        <a:srgbClr val="D1D5DB"/>
-                      </a:solidFill>
-                      <a:prstDash val="solid"/>
-                      <a:round/>
-                      <a:headEnd type="none" w="med" len="med"/>
-                      <a:tailEnd type="none" w="med" len="med"/>
-                    </a:lnT>
-                    <a:lnB w="6350" cap="flat" cmpd="sng" algn="ctr">
-                      <a:solidFill>
-                        <a:srgbClr val="D1D5DB"/>
-                      </a:solidFill>
-                      <a:prstDash val="solid"/>
-                      <a:round/>
-                      <a:headEnd type="none" w="med" len="med"/>
-                      <a:tailEnd type="none" w="med" len="med"/>
-                    </a:lnB>
+                  <a:tcPr>
+                    <a:solidFill>
+                      <a:srgbClr val="F1F5F9"/>
+                    </a:solidFill>
                   </a:tcPr>
                 </a:tc>
                 <a:tc>
@@ -4364,131 +4984,55 @@
                     <a:bodyPr/>
                     <a:lstStyle/>
                     <a:p>
-                      <a:pPr marL="0" indent="0" algn="ctr">
-                        <a:buNone/>
-                      </a:pPr>
+                      <a:pPr algn="ctr"/>
                       <a:r>
-                        <a:rPr lang="en-US" sz="1100" dirty="0">
+                        <a:rPr sz="950" b="0">
                           <a:solidFill>
                             <a:srgbClr val="1F2937"/>
                           </a:solidFill>
-                          <a:latin typeface="Calibri" pitchFamily="34" charset="0"/>
-                          <a:ea typeface="Calibri" pitchFamily="34" charset="-122"/>
-                          <a:cs typeface="Calibri" pitchFamily="34" charset="-120"/>
                         </a:rPr>
-                        <a:t>51 с</a:t>
+                        <a:t>0</a:t>
                       </a:r>
-                      <a:endParaRPr lang="en-US" sz="1100" dirty="0">
-                        <a:latin typeface="Calibri" pitchFamily="34" charset="0"/>
-                        <a:ea typeface="Calibri" pitchFamily="34" charset="0"/>
-                        <a:cs typeface="Calibri" pitchFamily="34" charset="0"/>
+                      <a:endParaRPr sz="950" b="0">
+                        <a:solidFill>
+                          <a:srgbClr val="1F2937"/>
+                        </a:solidFill>
                       </a:endParaRPr>
                     </a:p>
                   </a:txBody>
-                  <a:tcPr anchor="ctr">
-                    <a:lnL w="6350" cap="flat" cmpd="sng" algn="ctr">
-                      <a:solidFill>
-                        <a:srgbClr val="D1D5DB"/>
-                      </a:solidFill>
-                      <a:prstDash val="solid"/>
-                      <a:round/>
-                      <a:headEnd type="none" w="med" len="med"/>
-                      <a:tailEnd type="none" w="med" len="med"/>
-                    </a:lnL>
-                    <a:lnR w="6350" cap="flat" cmpd="sng" algn="ctr">
-                      <a:solidFill>
-                        <a:srgbClr val="D1D5DB"/>
-                      </a:solidFill>
-                      <a:prstDash val="solid"/>
-                      <a:round/>
-                      <a:headEnd type="none" w="med" len="med"/>
-                      <a:tailEnd type="none" w="med" len="med"/>
-                    </a:lnR>
-                    <a:lnT w="6350" cap="flat" cmpd="sng" algn="ctr">
-                      <a:solidFill>
-                        <a:srgbClr val="D1D5DB"/>
-                      </a:solidFill>
-                      <a:prstDash val="solid"/>
-                      <a:round/>
-                      <a:headEnd type="none" w="med" len="med"/>
-                      <a:tailEnd type="none" w="med" len="med"/>
-                    </a:lnT>
-                    <a:lnB w="6350" cap="flat" cmpd="sng" algn="ctr">
-                      <a:solidFill>
-                        <a:srgbClr val="D1D5DB"/>
-                      </a:solidFill>
-                      <a:prstDash val="solid"/>
-                      <a:round/>
-                      <a:headEnd type="none" w="med" len="med"/>
-                      <a:tailEnd type="none" w="med" len="med"/>
-                    </a:lnB>
+                  <a:tcPr>
+                    <a:solidFill>
+                      <a:srgbClr val="F1F5F9"/>
+                    </a:solidFill>
                   </a:tcPr>
                 </a:tc>
               </a:tr>
-              <a:tr h="292608">
+              <a:tr h="304800">
                 <a:tc>
                   <a:txBody>
                     <a:bodyPr/>
                     <a:lstStyle/>
                     <a:p>
-                      <a:pPr marL="0" indent="0" algn="ctr">
-                        <a:buNone/>
-                      </a:pPr>
+                      <a:pPr algn="l"/>
                       <a:r>
-                        <a:rPr lang="en-US" sz="1100" dirty="0">
+                        <a:rPr sz="950" b="0">
                           <a:solidFill>
                             <a:srgbClr val="1F2937"/>
                           </a:solidFill>
-                          <a:latin typeface="Calibri" pitchFamily="34" charset="0"/>
-                          <a:ea typeface="Calibri" pitchFamily="34" charset="-122"/>
-                          <a:cs typeface="Calibri" pitchFamily="34" charset="-120"/>
                         </a:rPr>
-                        <a:t>Транскрибация (10–15 с речи)</a:t>
+                        <a:t>medium</a:t>
                       </a:r>
-                      <a:endParaRPr lang="en-US" sz="1100" dirty="0">
-                        <a:latin typeface="Calibri" pitchFamily="34" charset="0"/>
-                        <a:ea typeface="Calibri" pitchFamily="34" charset="0"/>
-                        <a:cs typeface="Calibri" pitchFamily="34" charset="0"/>
+                      <a:endParaRPr sz="950" b="0">
+                        <a:solidFill>
+                          <a:srgbClr val="1F2937"/>
+                        </a:solidFill>
                       </a:endParaRPr>
                     </a:p>
                   </a:txBody>
-                  <a:tcPr anchor="ctr">
-                    <a:lnL w="6350" cap="flat" cmpd="sng" algn="ctr">
-                      <a:solidFill>
-                        <a:srgbClr val="D1D5DB"/>
-                      </a:solidFill>
-                      <a:prstDash val="solid"/>
-                      <a:round/>
-                      <a:headEnd type="none" w="med" len="med"/>
-                      <a:tailEnd type="none" w="med" len="med"/>
-                    </a:lnL>
-                    <a:lnR w="6350" cap="flat" cmpd="sng" algn="ctr">
-                      <a:solidFill>
-                        <a:srgbClr val="D1D5DB"/>
-                      </a:solidFill>
-                      <a:prstDash val="solid"/>
-                      <a:round/>
-                      <a:headEnd type="none" w="med" len="med"/>
-                      <a:tailEnd type="none" w="med" len="med"/>
-                    </a:lnR>
-                    <a:lnT w="6350" cap="flat" cmpd="sng" algn="ctr">
-                      <a:solidFill>
-                        <a:srgbClr val="D1D5DB"/>
-                      </a:solidFill>
-                      <a:prstDash val="solid"/>
-                      <a:round/>
-                      <a:headEnd type="none" w="med" len="med"/>
-                      <a:tailEnd type="none" w="med" len="med"/>
-                    </a:lnT>
-                    <a:lnB w="6350" cap="flat" cmpd="sng" algn="ctr">
-                      <a:solidFill>
-                        <a:srgbClr val="D1D5DB"/>
-                      </a:solidFill>
-                      <a:prstDash val="solid"/>
-                      <a:round/>
-                      <a:headEnd type="none" w="med" len="med"/>
-                      <a:tailEnd type="none" w="med" len="med"/>
-                    </a:lnB>
+                  <a:tcPr>
+                    <a:solidFill>
+                      <a:srgbClr val="FFFFFF"/>
+                    </a:solidFill>
                   </a:tcPr>
                 </a:tc>
                 <a:tc>
@@ -4496,64 +5040,26 @@
                     <a:bodyPr/>
                     <a:lstStyle/>
                     <a:p>
-                      <a:pPr marL="0" indent="0" algn="ctr">
-                        <a:buNone/>
-                      </a:pPr>
+                      <a:pPr algn="ctr"/>
                       <a:r>
-                        <a:rPr lang="en-US" sz="1100" dirty="0">
+                        <a:rPr sz="950" b="0">
                           <a:solidFill>
                             <a:srgbClr val="1F2937"/>
                           </a:solidFill>
-                          <a:latin typeface="Calibri" pitchFamily="34" charset="0"/>
-                          <a:ea typeface="Calibri" pitchFamily="34" charset="-122"/>
-                          <a:cs typeface="Calibri" pitchFamily="34" charset="-120"/>
                         </a:rPr>
-                        <a:t>3,7 с</a:t>
+                        <a:t>10</a:t>
                       </a:r>
-                      <a:endParaRPr lang="en-US" sz="1100" dirty="0">
-                        <a:latin typeface="Calibri" pitchFamily="34" charset="0"/>
-                        <a:ea typeface="Calibri" pitchFamily="34" charset="0"/>
-                        <a:cs typeface="Calibri" pitchFamily="34" charset="0"/>
+                      <a:endParaRPr sz="950" b="0">
+                        <a:solidFill>
+                          <a:srgbClr val="1F2937"/>
+                        </a:solidFill>
                       </a:endParaRPr>
                     </a:p>
                   </a:txBody>
-                  <a:tcPr anchor="ctr">
-                    <a:lnL w="6350" cap="flat" cmpd="sng" algn="ctr">
-                      <a:solidFill>
-                        <a:srgbClr val="D1D5DB"/>
-                      </a:solidFill>
-                      <a:prstDash val="solid"/>
-                      <a:round/>
-                      <a:headEnd type="none" w="med" len="med"/>
-                      <a:tailEnd type="none" w="med" len="med"/>
-                    </a:lnL>
-                    <a:lnR w="6350" cap="flat" cmpd="sng" algn="ctr">
-                      <a:solidFill>
-                        <a:srgbClr val="D1D5DB"/>
-                      </a:solidFill>
-                      <a:prstDash val="solid"/>
-                      <a:round/>
-                      <a:headEnd type="none" w="med" len="med"/>
-                      <a:tailEnd type="none" w="med" len="med"/>
-                    </a:lnR>
-                    <a:lnT w="6350" cap="flat" cmpd="sng" algn="ctr">
-                      <a:solidFill>
-                        <a:srgbClr val="D1D5DB"/>
-                      </a:solidFill>
-                      <a:prstDash val="solid"/>
-                      <a:round/>
-                      <a:headEnd type="none" w="med" len="med"/>
-                      <a:tailEnd type="none" w="med" len="med"/>
-                    </a:lnT>
-                    <a:lnB w="6350" cap="flat" cmpd="sng" algn="ctr">
-                      <a:solidFill>
-                        <a:srgbClr val="D1D5DB"/>
-                      </a:solidFill>
-                      <a:prstDash val="solid"/>
-                      <a:round/>
-                      <a:headEnd type="none" w="med" len="med"/>
-                      <a:tailEnd type="none" w="med" len="med"/>
-                    </a:lnB>
+                  <a:tcPr>
+                    <a:solidFill>
+                      <a:srgbClr val="FFFFFF"/>
+                    </a:solidFill>
                   </a:tcPr>
                 </a:tc>
                 <a:tc>
@@ -4561,64 +5067,26 @@
                     <a:bodyPr/>
                     <a:lstStyle/>
                     <a:p>
-                      <a:pPr marL="0" indent="0" algn="ctr">
-                        <a:buNone/>
-                      </a:pPr>
+                      <a:pPr algn="ctr"/>
                       <a:r>
-                        <a:rPr lang="en-US" sz="1100" dirty="0">
+                        <a:rPr sz="950" b="0">
                           <a:solidFill>
                             <a:srgbClr val="1F2937"/>
                           </a:solidFill>
-                          <a:latin typeface="Calibri" pitchFamily="34" charset="0"/>
-                          <a:ea typeface="Calibri" pitchFamily="34" charset="-122"/>
-                          <a:cs typeface="Calibri" pitchFamily="34" charset="-120"/>
                         </a:rPr>
-                        <a:t>2,2 с</a:t>
+                        <a:t>0.76</a:t>
                       </a:r>
-                      <a:endParaRPr lang="en-US" sz="1100" dirty="0">
-                        <a:latin typeface="Calibri" pitchFamily="34" charset="0"/>
-                        <a:ea typeface="Calibri" pitchFamily="34" charset="0"/>
-                        <a:cs typeface="Calibri" pitchFamily="34" charset="0"/>
+                      <a:endParaRPr sz="950" b="0">
+                        <a:solidFill>
+                          <a:srgbClr val="1F2937"/>
+                        </a:solidFill>
                       </a:endParaRPr>
                     </a:p>
                   </a:txBody>
-                  <a:tcPr anchor="ctr">
-                    <a:lnL w="6350" cap="flat" cmpd="sng" algn="ctr">
-                      <a:solidFill>
-                        <a:srgbClr val="D1D5DB"/>
-                      </a:solidFill>
-                      <a:prstDash val="solid"/>
-                      <a:round/>
-                      <a:headEnd type="none" w="med" len="med"/>
-                      <a:tailEnd type="none" w="med" len="med"/>
-                    </a:lnL>
-                    <a:lnR w="6350" cap="flat" cmpd="sng" algn="ctr">
-                      <a:solidFill>
-                        <a:srgbClr val="D1D5DB"/>
-                      </a:solidFill>
-                      <a:prstDash val="solid"/>
-                      <a:round/>
-                      <a:headEnd type="none" w="med" len="med"/>
-                      <a:tailEnd type="none" w="med" len="med"/>
-                    </a:lnR>
-                    <a:lnT w="6350" cap="flat" cmpd="sng" algn="ctr">
-                      <a:solidFill>
-                        <a:srgbClr val="D1D5DB"/>
-                      </a:solidFill>
-                      <a:prstDash val="solid"/>
-                      <a:round/>
-                      <a:headEnd type="none" w="med" len="med"/>
-                      <a:tailEnd type="none" w="med" len="med"/>
-                    </a:lnT>
-                    <a:lnB w="6350" cap="flat" cmpd="sng" algn="ctr">
-                      <a:solidFill>
-                        <a:srgbClr val="D1D5DB"/>
-                      </a:solidFill>
-                      <a:prstDash val="solid"/>
-                      <a:round/>
-                      <a:headEnd type="none" w="med" len="med"/>
-                      <a:tailEnd type="none" w="med" len="med"/>
-                    </a:lnB>
+                  <a:tcPr>
+                    <a:solidFill>
+                      <a:srgbClr val="FFFFFF"/>
+                    </a:solidFill>
                   </a:tcPr>
                 </a:tc>
                 <a:tc>
@@ -4626,64 +5094,327 @@
                     <a:bodyPr/>
                     <a:lstStyle/>
                     <a:p>
-                      <a:pPr marL="0" indent="0" algn="ctr">
-                        <a:buNone/>
-                      </a:pPr>
+                      <a:pPr algn="ctr"/>
                       <a:r>
-                        <a:rPr lang="en-US" sz="1100" dirty="0">
+                        <a:rPr sz="950" b="0">
                           <a:solidFill>
                             <a:srgbClr val="1F2937"/>
                           </a:solidFill>
-                          <a:latin typeface="Calibri" pitchFamily="34" charset="0"/>
-                          <a:ea typeface="Calibri" pitchFamily="34" charset="-122"/>
-                          <a:cs typeface="Calibri" pitchFamily="34" charset="-120"/>
                         </a:rPr>
-                        <a:t>6,5 с</a:t>
+                        <a:t>1.00</a:t>
                       </a:r>
-                      <a:endParaRPr lang="en-US" sz="1100" dirty="0">
-                        <a:latin typeface="Calibri" pitchFamily="34" charset="0"/>
-                        <a:ea typeface="Calibri" pitchFamily="34" charset="0"/>
-                        <a:cs typeface="Calibri" pitchFamily="34" charset="0"/>
+                      <a:endParaRPr sz="950" b="0">
+                        <a:solidFill>
+                          <a:srgbClr val="1F2937"/>
+                        </a:solidFill>
                       </a:endParaRPr>
                     </a:p>
                   </a:txBody>
-                  <a:tcPr anchor="ctr">
-                    <a:lnL w="6350" cap="flat" cmpd="sng" algn="ctr">
-                      <a:solidFill>
-                        <a:srgbClr val="D1D5DB"/>
-                      </a:solidFill>
-                      <a:prstDash val="solid"/>
-                      <a:round/>
-                      <a:headEnd type="none" w="med" len="med"/>
-                      <a:tailEnd type="none" w="med" len="med"/>
-                    </a:lnL>
-                    <a:lnR w="6350" cap="flat" cmpd="sng" algn="ctr">
-                      <a:solidFill>
-                        <a:srgbClr val="D1D5DB"/>
-                      </a:solidFill>
-                      <a:prstDash val="solid"/>
-                      <a:round/>
-                      <a:headEnd type="none" w="med" len="med"/>
-                      <a:tailEnd type="none" w="med" len="med"/>
-                    </a:lnR>
-                    <a:lnT w="6350" cap="flat" cmpd="sng" algn="ctr">
-                      <a:solidFill>
-                        <a:srgbClr val="D1D5DB"/>
-                      </a:solidFill>
-                      <a:prstDash val="solid"/>
-                      <a:round/>
-                      <a:headEnd type="none" w="med" len="med"/>
-                      <a:tailEnd type="none" w="med" len="med"/>
-                    </a:lnT>
-                    <a:lnB w="6350" cap="flat" cmpd="sng" algn="ctr">
-                      <a:solidFill>
-                        <a:srgbClr val="D1D5DB"/>
-                      </a:solidFill>
-                      <a:prstDash val="solid"/>
-                      <a:round/>
-                      <a:headEnd type="none" w="med" len="med"/>
-                      <a:tailEnd type="none" w="med" len="med"/>
-                    </a:lnB>
+                  <a:tcPr>
+                    <a:solidFill>
+                      <a:srgbClr val="FFFFFF"/>
+                    </a:solidFill>
+                  </a:tcPr>
+                </a:tc>
+                <a:tc>
+                  <a:txBody>
+                    <a:bodyPr/>
+                    <a:lstStyle/>
+                    <a:p>
+                      <a:pPr algn="ctr"/>
+                      <a:r>
+                        <a:rPr sz="950" b="0">
+                          <a:solidFill>
+                            <a:srgbClr val="1F2937"/>
+                          </a:solidFill>
+                        </a:rPr>
+                        <a:t>0</a:t>
+                      </a:r>
+                      <a:endParaRPr sz="950" b="0">
+                        <a:solidFill>
+                          <a:srgbClr val="1F2937"/>
+                        </a:solidFill>
+                      </a:endParaRPr>
+                    </a:p>
+                  </a:txBody>
+                  <a:tcPr>
+                    <a:solidFill>
+                      <a:srgbClr val="FFFFFF"/>
+                    </a:solidFill>
+                  </a:tcPr>
+                </a:tc>
+              </a:tr>
+              <a:tr h="304800">
+                <a:tc>
+                  <a:txBody>
+                    <a:bodyPr/>
+                    <a:lstStyle/>
+                    <a:p>
+                      <a:pPr algn="l"/>
+                      <a:r>
+                        <a:rPr sz="950" b="0">
+                          <a:solidFill>
+                            <a:srgbClr val="1F2937"/>
+                          </a:solidFill>
+                        </a:rPr>
+                        <a:t>complex</a:t>
+                      </a:r>
+                      <a:endParaRPr sz="950" b="0">
+                        <a:solidFill>
+                          <a:srgbClr val="1F2937"/>
+                        </a:solidFill>
+                      </a:endParaRPr>
+                    </a:p>
+                  </a:txBody>
+                  <a:tcPr>
+                    <a:solidFill>
+                      <a:srgbClr val="F1F5F9"/>
+                    </a:solidFill>
+                  </a:tcPr>
+                </a:tc>
+                <a:tc>
+                  <a:txBody>
+                    <a:bodyPr/>
+                    <a:lstStyle/>
+                    <a:p>
+                      <a:pPr algn="ctr"/>
+                      <a:r>
+                        <a:rPr sz="950" b="0">
+                          <a:solidFill>
+                            <a:srgbClr val="1F2937"/>
+                          </a:solidFill>
+                        </a:rPr>
+                        <a:t>10</a:t>
+                      </a:r>
+                      <a:endParaRPr sz="950" b="0">
+                        <a:solidFill>
+                          <a:srgbClr val="1F2937"/>
+                        </a:solidFill>
+                      </a:endParaRPr>
+                    </a:p>
+                  </a:txBody>
+                  <a:tcPr>
+                    <a:solidFill>
+                      <a:srgbClr val="F1F5F9"/>
+                    </a:solidFill>
+                  </a:tcPr>
+                </a:tc>
+                <a:tc>
+                  <a:txBody>
+                    <a:bodyPr/>
+                    <a:lstStyle/>
+                    <a:p>
+                      <a:pPr algn="ctr"/>
+                      <a:r>
+                        <a:rPr sz="950" b="0">
+                          <a:solidFill>
+                            <a:srgbClr val="1F2937"/>
+                          </a:solidFill>
+                        </a:rPr>
+                        <a:t>0.92</a:t>
+                      </a:r>
+                      <a:endParaRPr sz="950" b="0">
+                        <a:solidFill>
+                          <a:srgbClr val="1F2937"/>
+                        </a:solidFill>
+                      </a:endParaRPr>
+                    </a:p>
+                  </a:txBody>
+                  <a:tcPr>
+                    <a:solidFill>
+                      <a:srgbClr val="F1F5F9"/>
+                    </a:solidFill>
+                  </a:tcPr>
+                </a:tc>
+                <a:tc>
+                  <a:txBody>
+                    <a:bodyPr/>
+                    <a:lstStyle/>
+                    <a:p>
+                      <a:pPr algn="ctr"/>
+                      <a:r>
+                        <a:rPr sz="950" b="0">
+                          <a:solidFill>
+                            <a:srgbClr val="1F2937"/>
+                          </a:solidFill>
+                        </a:rPr>
+                        <a:t>1.00</a:t>
+                      </a:r>
+                      <a:endParaRPr sz="950" b="0">
+                        <a:solidFill>
+                          <a:srgbClr val="1F2937"/>
+                        </a:solidFill>
+                      </a:endParaRPr>
+                    </a:p>
+                  </a:txBody>
+                  <a:tcPr>
+                    <a:solidFill>
+                      <a:srgbClr val="F1F5F9"/>
+                    </a:solidFill>
+                  </a:tcPr>
+                </a:tc>
+                <a:tc>
+                  <a:txBody>
+                    <a:bodyPr/>
+                    <a:lstStyle/>
+                    <a:p>
+                      <a:pPr algn="ctr"/>
+                      <a:r>
+                        <a:rPr sz="950" b="0">
+                          <a:solidFill>
+                            <a:srgbClr val="1F2937"/>
+                          </a:solidFill>
+                        </a:rPr>
+                        <a:t>0</a:t>
+                      </a:r>
+                      <a:endParaRPr sz="950" b="0">
+                        <a:solidFill>
+                          <a:srgbClr val="1F2937"/>
+                        </a:solidFill>
+                      </a:endParaRPr>
+                    </a:p>
+                  </a:txBody>
+                  <a:tcPr>
+                    <a:solidFill>
+                      <a:srgbClr val="F1F5F9"/>
+                    </a:solidFill>
+                  </a:tcPr>
+                </a:tc>
+              </a:tr>
+              <a:tr h="304800">
+                <a:tc>
+                  <a:txBody>
+                    <a:bodyPr/>
+                    <a:lstStyle/>
+                    <a:p>
+                      <a:pPr algn="l"/>
+                      <a:r>
+                        <a:rPr sz="950" b="0">
+                          <a:solidFill>
+                            <a:srgbClr val="1F2937"/>
+                          </a:solidFill>
+                        </a:rPr>
+                        <a:t>hallucination_trap</a:t>
+                      </a:r>
+                      <a:endParaRPr sz="950" b="0">
+                        <a:solidFill>
+                          <a:srgbClr val="1F2937"/>
+                        </a:solidFill>
+                      </a:endParaRPr>
+                    </a:p>
+                  </a:txBody>
+                  <a:tcPr>
+                    <a:solidFill>
+                      <a:srgbClr val="FFFFFF"/>
+                    </a:solidFill>
+                  </a:tcPr>
+                </a:tc>
+                <a:tc>
+                  <a:txBody>
+                    <a:bodyPr/>
+                    <a:lstStyle/>
+                    <a:p>
+                      <a:pPr algn="ctr"/>
+                      <a:r>
+                        <a:rPr sz="950" b="0">
+                          <a:solidFill>
+                            <a:srgbClr val="1F2937"/>
+                          </a:solidFill>
+                        </a:rPr>
+                        <a:t>10</a:t>
+                      </a:r>
+                      <a:endParaRPr sz="950" b="0">
+                        <a:solidFill>
+                          <a:srgbClr val="1F2937"/>
+                        </a:solidFill>
+                      </a:endParaRPr>
+                    </a:p>
+                  </a:txBody>
+                  <a:tcPr>
+                    <a:solidFill>
+                      <a:srgbClr val="FFFFFF"/>
+                    </a:solidFill>
+                  </a:tcPr>
+                </a:tc>
+                <a:tc>
+                  <a:txBody>
+                    <a:bodyPr/>
+                    <a:lstStyle/>
+                    <a:p>
+                      <a:pPr algn="ctr"/>
+                      <a:r>
+                        <a:rPr sz="950" b="0">
+                          <a:solidFill>
+                            <a:srgbClr val="1F2937"/>
+                          </a:solidFill>
+                        </a:rPr>
+                        <a:t>1.00</a:t>
+                      </a:r>
+                      <a:endParaRPr sz="950" b="0">
+                        <a:solidFill>
+                          <a:srgbClr val="1F2937"/>
+                        </a:solidFill>
+                      </a:endParaRPr>
+                    </a:p>
+                  </a:txBody>
+                  <a:tcPr>
+                    <a:solidFill>
+                      <a:srgbClr val="FFFFFF"/>
+                    </a:solidFill>
+                  </a:tcPr>
+                </a:tc>
+                <a:tc>
+                  <a:txBody>
+                    <a:bodyPr/>
+                    <a:lstStyle/>
+                    <a:p>
+                      <a:pPr algn="ctr"/>
+                      <a:r>
+                        <a:rPr sz="950" b="0">
+                          <a:solidFill>
+                            <a:srgbClr val="1F2937"/>
+                          </a:solidFill>
+                        </a:rPr>
+                        <a:t>—</a:t>
+                      </a:r>
+                      <a:endParaRPr sz="950" b="0">
+                        <a:solidFill>
+                          <a:srgbClr val="1F2937"/>
+                        </a:solidFill>
+                      </a:endParaRPr>
+                    </a:p>
+                  </a:txBody>
+                  <a:tcPr>
+                    <a:solidFill>
+                      <a:srgbClr val="FFFFFF"/>
+                    </a:solidFill>
+                  </a:tcPr>
+                </a:tc>
+                <a:tc>
+                  <a:txBody>
+                    <a:bodyPr/>
+                    <a:lstStyle/>
+                    <a:p>
+                      <a:pPr algn="ctr"/>
+                      <a:r>
+                        <a:rPr sz="950" b="0">
+                          <a:solidFill>
+                            <a:srgbClr val="EF4444"/>
+                          </a:solidFill>
+                        </a:rPr>
+                        <a:t>4</a:t>
+                      </a:r>
+                      <a:endParaRPr sz="950" b="0">
+                        <a:solidFill>
+                          <a:srgbClr val="EF4444"/>
+                        </a:solidFill>
+                      </a:endParaRPr>
+                    </a:p>
+                  </a:txBody>
+                  <a:tcPr>
+                    <a:solidFill>
+                      <a:srgbClr val="FFFFFF"/>
+                    </a:solidFill>
                   </a:tcPr>
                 </a:tc>
               </a:tr>
@@ -4693,77 +5424,126 @@
       </p:graphicFrame>
       <p:sp>
         <p:nvSpPr>
-          <p:cNvPr id="25" name="Text 22"/>
-          <p:cNvSpPr/>
-          <p:nvPr/>
-        </p:nvSpPr>
-        <p:spPr>
-          <a:xfrm>
-            <a:off x="365760" y="4892040"/>
-            <a:ext cx="6400800" cy="228600"/>
-          </a:xfrm>
-          <a:prstGeom prst="rect">
-            <a:avLst/>
-          </a:prstGeom>
-          <a:noFill/>
-        </p:spPr>
-        <p:txBody>
-          <a:bodyPr wrap="square" lIns="0" tIns="0" rIns="0" bIns="0" rtlCol="0" anchor="ctr"/>
-          <a:lstStyle/>
-          <a:p>
-            <a:pPr marL="0" indent="0">
-              <a:buNone/>
-            </a:pPr>
-            <a:r>
-              <a:rPr lang="en-US" sz="900" dirty="0">
-                <a:solidFill>
-                  <a:srgbClr val="6B7280"/>
-                </a:solidFill>
-                <a:latin typeface="Calibri" pitchFamily="34" charset="0"/>
-                <a:ea typeface="Calibri" pitchFamily="34" charset="-122"/>
-                <a:cs typeface="Calibri" pitchFamily="34" charset="-120"/>
-              </a:rPr>
-              <a:t>Атрошенко Б. С.  •  ВКР  •  ЯрГУ, 2026</a:t>
-            </a:r>
-            <a:endParaRPr lang="en-US" sz="900" dirty="0"/>
-          </a:p>
-        </p:txBody>
-      </p:sp>
-      <p:sp>
-        <p:nvSpPr>
-          <p:cNvPr id="26" name="Text 23"/>
-          <p:cNvSpPr/>
-          <p:nvPr/>
-        </p:nvSpPr>
-        <p:spPr>
-          <a:xfrm>
-            <a:off x="7863840" y="4892040"/>
-            <a:ext cx="914400" cy="228600"/>
-          </a:xfrm>
-          <a:prstGeom prst="rect">
-            <a:avLst/>
-          </a:prstGeom>
-          <a:noFill/>
-        </p:spPr>
-        <p:txBody>
-          <a:bodyPr wrap="square" lIns="0" tIns="0" rIns="0" bIns="0" rtlCol="0" anchor="ctr"/>
-          <a:lstStyle/>
-          <a:p>
-            <a:pPr marL="0" indent="0" algn="r">
-              <a:buNone/>
-            </a:pPr>
-            <a:r>
-              <a:rPr lang="en-US" sz="900" dirty="0">
-                <a:solidFill>
-                  <a:srgbClr val="6B7280"/>
-                </a:solidFill>
-                <a:latin typeface="Calibri" pitchFamily="34" charset="0"/>
-                <a:ea typeface="Calibri" pitchFamily="34" charset="-122"/>
-                <a:cs typeface="Calibri" pitchFamily="34" charset="-120"/>
-              </a:rPr>
-              <a:t>11 / 13</a:t>
-            </a:r>
-            <a:endParaRPr lang="en-US" sz="900" dirty="0"/>
+          <p:cNvPr id="26" name="TextBox 25"/>
+          <p:cNvSpPr txBox="1"/>
+          <p:nvPr/>
+        </p:nvSpPr>
+        <p:spPr>
+          <a:xfrm>
+            <a:off x="365760" y="4070350"/>
+            <a:ext cx="8412480" cy="822325"/>
+          </a:xfrm>
+          <a:prstGeom prst="rect">
+            <a:avLst/>
+          </a:prstGeom>
+          <a:noFill/>
+        </p:spPr>
+        <p:txBody>
+          <a:bodyPr wrap="square">
+            <a:noAutofit/>
+          </a:bodyPr>
+          <a:lstStyle/>
+          <a:p>
+            <a:r>
+              <a:rPr sz="950" b="1">
+                <a:solidFill>
+                  <a:srgbClr val="00B4A6"/>
+                </a:solidFill>
+              </a:rPr>
+              <a:t>Retrieval: </a:t>
+            </a:r>
+            <a:r>
+              <a:rPr sz="950" b="0">
+                <a:solidFill>
+                  <a:srgbClr val="1F2937"/>
+                </a:solidFill>
+              </a:rPr>
+              <a:t>Recall@10 = 100% — поиск работает без пропусков   </a:t>
+            </a:r>
+            <a:endParaRPr sz="950" b="0">
+              <a:solidFill>
+                <a:srgbClr val="1F2937"/>
+              </a:solidFill>
+            </a:endParaRPr>
+          </a:p>
+          <a:p>
+            <a:r>
+              <a:rPr sz="950" b="1">
+                <a:solidFill>
+                  <a:srgbClr val="0F2A4A"/>
+                </a:solidFill>
+              </a:rPr>
+              <a:t>Точность: </a:t>
+            </a:r>
+            <a:r>
+              <a:rPr sz="950" b="0">
+                <a:solidFill>
+                  <a:srgbClr val="1F2937"/>
+                </a:solidFill>
+              </a:rPr>
+              <a:t>Factual 0.93 avg; medium 0.76 — требует синтеза нескольких документов</a:t>
+            </a:r>
+            <a:endParaRPr sz="950" b="0">
+              <a:solidFill>
+                <a:srgbClr val="1F2937"/>
+              </a:solidFill>
+            </a:endParaRPr>
+          </a:p>
+          <a:p>
+            <a:pPr>
+              <a:spcBef>
+                <a:spcPts val="500"/>
+              </a:spcBef>
+            </a:pPr>
+            <a:r>
+              <a:rPr sz="950" b="1">
+                <a:solidFill>
+                  <a:srgbClr val="F4A261"/>
+                </a:solidFill>
+              </a:rPr>
+              <a:t>Галлюцинации: </a:t>
+            </a:r>
+            <a:r>
+              <a:rPr sz="950" b="0">
+                <a:solidFill>
+                  <a:srgbClr val="1F2937"/>
+                </a:solidFill>
+              </a:rPr>
+              <a:t>0 на реальных вопросах; 4/10 на ловушках — phi3:mini придумывает при отсутствии данных  </a:t>
+            </a:r>
+            <a:endParaRPr sz="950" b="0">
+              <a:solidFill>
+                <a:srgbClr val="1F2937"/>
+              </a:solidFill>
+            </a:endParaRPr>
+          </a:p>
+          <a:p>
+            <a:pPr>
+              <a:spcBef>
+                <a:spcPts val="500"/>
+              </a:spcBef>
+            </a:pPr>
+            <a:r>
+              <a:rPr sz="950" b="1">
+                <a:solidFill>
+                  <a:srgbClr val="EF4444"/>
+                </a:solidFill>
+              </a:rPr>
+              <a:t>TTFT avg: </a:t>
+            </a:r>
+            <a:r>
+              <a:rPr sz="950" b="0">
+                <a:solidFill>
+                  <a:srgbClr val="1F2937"/>
+                </a:solidFill>
+              </a:rPr>
+              <a:t>12.5 с — ограничена CPU-инференсом phi3:mini (~40–50 tok/s)</a:t>
+            </a:r>
+            <a:endParaRPr sz="950" b="0">
+              <a:solidFill>
+                <a:srgbClr val="1F2937"/>
+              </a:solidFill>
+            </a:endParaRPr>
           </a:p>
         </p:txBody>
       </p:sp>
@@ -4775,7 +5555,7 @@
 </p:sld>
 </file>
 
-<file path=ppt/slides/slide12.xml><?xml version="1.0" encoding="utf-8"?>
+<file path=ppt/slides/slide13.xml><?xml version="1.0" encoding="utf-8"?>
 <p:sld xmlns:a="http://schemas.openxmlformats.org/drawingml/2006/main" xmlns:r="http://schemas.openxmlformats.org/officeDocument/2006/relationships" xmlns:p="http://schemas.openxmlformats.org/presentationml/2006/main">
   <p:cSld>
     <p:bg>
@@ -4818,6 +5598,10 @@
             <a:srgbClr val="0F2A4A"/>
           </a:solidFill>
         </p:spPr>
+        <p:txBody>
+          <a:bodyPr/>
+          <a:p/>
+        </p:txBody>
       </p:sp>
       <p:sp>
         <p:nvSpPr>
@@ -4889,7 +5673,7 @@
                 <a:ea typeface="Calibri" pitchFamily="34" charset="-122"/>
                 <a:cs typeface="Calibri" pitchFamily="34" charset="-120"/>
               </a:rPr>
-              <a:t>12</a:t>
+              <a:t>13</a:t>
             </a:r>
             <a:endParaRPr lang="en-US" sz="1200" dirty="0"/>
           </a:p>
@@ -4926,6 +5710,10 @@
             </a:outerShdw>
           </a:effectLst>
         </p:spPr>
+        <p:txBody>
+          <a:bodyPr/>
+          <a:p/>
+        </p:txBody>
       </p:sp>
       <p:sp>
         <p:nvSpPr>
@@ -4945,6 +5733,10 @@
             <a:srgbClr val="00B4A6"/>
           </a:solidFill>
         </p:spPr>
+        <p:txBody>
+          <a:bodyPr/>
+          <a:p/>
+        </p:txBody>
       </p:sp>
       <p:sp>
         <p:nvSpPr>
@@ -5141,6 +5933,10 @@
             </a:outerShdw>
           </a:effectLst>
         </p:spPr>
+        <p:txBody>
+          <a:bodyPr/>
+          <a:p/>
+        </p:txBody>
       </p:sp>
       <p:sp>
         <p:nvSpPr>
@@ -5160,6 +5956,10 @@
             <a:srgbClr val="0F2A4A"/>
           </a:solidFill>
         </p:spPr>
+        <p:txBody>
+          <a:bodyPr/>
+          <a:p/>
+        </p:txBody>
       </p:sp>
       <p:sp>
         <p:nvSpPr>
@@ -5395,7 +6195,7 @@
                 <a:ea typeface="Calibri" pitchFamily="34" charset="-122"/>
                 <a:cs typeface="Calibri" pitchFamily="34" charset="-120"/>
               </a:rPr>
-              <a:t>12 / 13</a:t>
+              <a:t>13 / 14</a:t>
             </a:r>
             <a:endParaRPr lang="en-US" sz="900" dirty="0"/>
           </a:p>
@@ -5409,7 +6209,7 @@
 </p:sld>
 </file>
 
-<file path=ppt/slides/slide13.xml><?xml version="1.0" encoding="utf-8"?>
+<file path=ppt/slides/slide14.xml><?xml version="1.0" encoding="utf-8"?>
 <p:sld xmlns:a="http://schemas.openxmlformats.org/drawingml/2006/main" xmlns:r="http://schemas.openxmlformats.org/officeDocument/2006/relationships" xmlns:p="http://schemas.openxmlformats.org/presentationml/2006/main">
   <p:cSld>
     <p:bg>
@@ -5618,6 +6418,10 @@
             <a:srgbClr val="0F2A4A"/>
           </a:solidFill>
         </p:spPr>
+        <p:txBody>
+          <a:bodyPr/>
+          <a:p/>
+        </p:txBody>
       </p:sp>
       <p:sp>
         <p:nvSpPr>
@@ -5869,6 +6673,10 @@
             </a:outerShdw>
           </a:effectLst>
         </p:spPr>
+        <p:txBody>
+          <a:bodyPr/>
+          <a:p/>
+        </p:txBody>
       </p:sp>
       <p:sp>
         <p:nvSpPr>
@@ -6031,6 +6839,10 @@
             <a:srgbClr val="0F2A4A"/>
           </a:solidFill>
         </p:spPr>
+        <p:txBody>
+          <a:bodyPr/>
+          <a:p/>
+        </p:txBody>
       </p:sp>
       <p:sp>
         <p:nvSpPr>
@@ -6157,7 +6969,7 @@
                 <a:ea typeface="Calibri" pitchFamily="34" charset="-122"/>
                 <a:cs typeface="Calibri" pitchFamily="34" charset="-120"/>
               </a:rPr>
-              <a:t>2 / 13</a:t>
+              <a:t>2 / 14</a:t>
             </a:r>
             <a:endParaRPr lang="en-US" sz="900" dirty="0"/>
           </a:p>
@@ -6214,6 +7026,10 @@
             <a:srgbClr val="0F2A4A"/>
           </a:solidFill>
         </p:spPr>
+        <p:txBody>
+          <a:bodyPr/>
+          <a:p/>
+        </p:txBody>
       </p:sp>
       <p:sp>
         <p:nvSpPr>
@@ -6309,6 +7125,10 @@
             <a:srgbClr val="0F2A4A"/>
           </a:solidFill>
         </p:spPr>
+        <p:txBody>
+          <a:bodyPr/>
+          <a:p/>
+        </p:txBody>
       </p:sp>
       <p:sp>
         <p:nvSpPr>
@@ -6442,6 +7262,10 @@
             <a:srgbClr val="00B4A6"/>
           </a:solidFill>
         </p:spPr>
+        <p:txBody>
+          <a:bodyPr/>
+          <a:p/>
+        </p:txBody>
       </p:sp>
       <p:sp>
         <p:nvSpPr>
@@ -6537,6 +7361,10 @@
             <a:srgbClr val="00B4A6"/>
           </a:solidFill>
         </p:spPr>
+        <p:txBody>
+          <a:bodyPr/>
+          <a:p/>
+        </p:txBody>
       </p:sp>
       <p:sp>
         <p:nvSpPr>
@@ -6632,6 +7460,10 @@
             <a:srgbClr val="00B4A6"/>
           </a:solidFill>
         </p:spPr>
+        <p:txBody>
+          <a:bodyPr/>
+          <a:p/>
+        </p:txBody>
       </p:sp>
       <p:sp>
         <p:nvSpPr>
@@ -6727,6 +7559,10 @@
             <a:srgbClr val="00B4A6"/>
           </a:solidFill>
         </p:spPr>
+        <p:txBody>
+          <a:bodyPr/>
+          <a:p/>
+        </p:txBody>
       </p:sp>
       <p:sp>
         <p:nvSpPr>
@@ -6822,6 +7658,10 @@
             <a:srgbClr val="00B4A6"/>
           </a:solidFill>
         </p:spPr>
+        <p:txBody>
+          <a:bodyPr/>
+          <a:p/>
+        </p:txBody>
       </p:sp>
       <p:sp>
         <p:nvSpPr>
@@ -6917,6 +7757,10 @@
             <a:srgbClr val="00B4A6"/>
           </a:solidFill>
         </p:spPr>
+        <p:txBody>
+          <a:bodyPr/>
+          <a:p/>
+        </p:txBody>
       </p:sp>
       <p:sp>
         <p:nvSpPr>
@@ -7064,7 +7908,7 @@
                 <a:ea typeface="Calibri" pitchFamily="34" charset="-122"/>
                 <a:cs typeface="Calibri" pitchFamily="34" charset="-120"/>
               </a:rPr>
-              <a:t>3 / 13</a:t>
+              <a:t>3 / 14</a:t>
             </a:r>
             <a:endParaRPr lang="en-US" sz="900" dirty="0"/>
           </a:p>
@@ -7121,6 +7965,10 @@
             <a:srgbClr val="0F2A4A"/>
           </a:solidFill>
         </p:spPr>
+        <p:txBody>
+          <a:bodyPr/>
+          <a:p/>
+        </p:txBody>
       </p:sp>
       <p:sp>
         <p:nvSpPr>
@@ -9300,6 +10148,10 @@
             <a:prstDash val="solid"/>
           </a:ln>
         </p:spPr>
+        <p:txBody>
+          <a:bodyPr/>
+          <a:p/>
+        </p:txBody>
       </p:sp>
       <p:sp>
         <p:nvSpPr>
@@ -9319,6 +10171,10 @@
             <a:srgbClr val="00B4A6"/>
           </a:solidFill>
         </p:spPr>
+        <p:txBody>
+          <a:bodyPr/>
+          <a:p/>
+        </p:txBody>
       </p:sp>
       <p:sp>
         <p:nvSpPr>
@@ -9420,6 +10276,10 @@
             <a:prstDash val="solid"/>
           </a:ln>
         </p:spPr>
+        <p:txBody>
+          <a:bodyPr/>
+          <a:p/>
+        </p:txBody>
       </p:sp>
       <p:sp>
         <p:nvSpPr>
@@ -9439,6 +10299,10 @@
             <a:srgbClr val="00B4A6"/>
           </a:solidFill>
         </p:spPr>
+        <p:txBody>
+          <a:bodyPr/>
+          <a:p/>
+        </p:txBody>
       </p:sp>
       <p:sp>
         <p:nvSpPr>
@@ -9540,6 +10404,10 @@
             <a:prstDash val="solid"/>
           </a:ln>
         </p:spPr>
+        <p:txBody>
+          <a:bodyPr/>
+          <a:p/>
+        </p:txBody>
       </p:sp>
       <p:sp>
         <p:nvSpPr>
@@ -9559,6 +10427,10 @@
             <a:srgbClr val="00B4A6"/>
           </a:solidFill>
         </p:spPr>
+        <p:txBody>
+          <a:bodyPr/>
+          <a:p/>
+        </p:txBody>
       </p:sp>
       <p:sp>
         <p:nvSpPr>
@@ -9706,7 +10578,7 @@
                 <a:ea typeface="Calibri" pitchFamily="34" charset="-122"/>
                 <a:cs typeface="Calibri" pitchFamily="34" charset="-120"/>
               </a:rPr>
-              <a:t>4 / 13</a:t>
+              <a:t>4 / 14</a:t>
             </a:r>
             <a:endParaRPr lang="en-US" sz="900" dirty="0"/>
           </a:p>
@@ -9763,6 +10635,10 @@
             <a:srgbClr val="0F2A4A"/>
           </a:solidFill>
         </p:spPr>
+        <p:txBody>
+          <a:bodyPr/>
+          <a:p/>
+        </p:txBody>
       </p:sp>
       <p:sp>
         <p:nvSpPr>
@@ -9871,6 +10747,10 @@
             </a:outerShdw>
           </a:effectLst>
         </p:spPr>
+        <p:txBody>
+          <a:bodyPr/>
+          <a:p/>
+        </p:txBody>
       </p:sp>
       <p:sp>
         <p:nvSpPr>
@@ -9890,6 +10770,10 @@
             <a:srgbClr val="00B4A6"/>
           </a:solidFill>
         </p:spPr>
+        <p:txBody>
+          <a:bodyPr/>
+          <a:p/>
+        </p:txBody>
       </p:sp>
       <p:sp>
         <p:nvSpPr>
@@ -9998,6 +10882,10 @@
             </a:outerShdw>
           </a:effectLst>
         </p:spPr>
+        <p:txBody>
+          <a:bodyPr/>
+          <a:p/>
+        </p:txBody>
       </p:sp>
       <p:sp>
         <p:nvSpPr>
@@ -10017,6 +10905,10 @@
             <a:srgbClr val="00B4A6"/>
           </a:solidFill>
         </p:spPr>
+        <p:txBody>
+          <a:bodyPr/>
+          <a:p/>
+        </p:txBody>
       </p:sp>
       <p:sp>
         <p:nvSpPr>
@@ -10125,6 +11017,10 @@
             </a:outerShdw>
           </a:effectLst>
         </p:spPr>
+        <p:txBody>
+          <a:bodyPr/>
+          <a:p/>
+        </p:txBody>
       </p:sp>
       <p:sp>
         <p:nvSpPr>
@@ -10144,6 +11040,10 @@
             <a:srgbClr val="00B4A6"/>
           </a:solidFill>
         </p:spPr>
+        <p:txBody>
+          <a:bodyPr/>
+          <a:p/>
+        </p:txBody>
       </p:sp>
       <p:sp>
         <p:nvSpPr>
@@ -10252,6 +11152,10 @@
             </a:outerShdw>
           </a:effectLst>
         </p:spPr>
+        <p:txBody>
+          <a:bodyPr/>
+          <a:p/>
+        </p:txBody>
       </p:sp>
       <p:sp>
         <p:nvSpPr>
@@ -10271,6 +11175,10 @@
             <a:srgbClr val="00B4A6"/>
           </a:solidFill>
         </p:spPr>
+        <p:txBody>
+          <a:bodyPr/>
+          <a:p/>
+        </p:txBody>
       </p:sp>
       <p:sp>
         <p:nvSpPr>
@@ -10379,6 +11287,10 @@
             </a:outerShdw>
           </a:effectLst>
         </p:spPr>
+        <p:txBody>
+          <a:bodyPr/>
+          <a:p/>
+        </p:txBody>
       </p:sp>
       <p:sp>
         <p:nvSpPr>
@@ -10398,6 +11310,10 @@
             <a:srgbClr val="00B4A6"/>
           </a:solidFill>
         </p:spPr>
+        <p:txBody>
+          <a:bodyPr/>
+          <a:p/>
+        </p:txBody>
       </p:sp>
       <p:sp>
         <p:nvSpPr>
@@ -10506,6 +11422,10 @@
             </a:outerShdw>
           </a:effectLst>
         </p:spPr>
+        <p:txBody>
+          <a:bodyPr/>
+          <a:p/>
+        </p:txBody>
       </p:sp>
       <p:sp>
         <p:nvSpPr>
@@ -10525,6 +11445,10 @@
             <a:srgbClr val="00B4A6"/>
           </a:solidFill>
         </p:spPr>
+        <p:txBody>
+          <a:bodyPr/>
+          <a:p/>
+        </p:txBody>
       </p:sp>
       <p:sp>
         <p:nvSpPr>
@@ -10633,6 +11557,10 @@
             </a:outerShdw>
           </a:effectLst>
         </p:spPr>
+        <p:txBody>
+          <a:bodyPr/>
+          <a:p/>
+        </p:txBody>
       </p:sp>
       <p:sp>
         <p:nvSpPr>
@@ -10652,6 +11580,10 @@
             <a:srgbClr val="00B4A6"/>
           </a:solidFill>
         </p:spPr>
+        <p:txBody>
+          <a:bodyPr/>
+          <a:p/>
+        </p:txBody>
       </p:sp>
       <p:sp>
         <p:nvSpPr>
@@ -10760,6 +11692,10 @@
             </a:outerShdw>
           </a:effectLst>
         </p:spPr>
+        <p:txBody>
+          <a:bodyPr/>
+          <a:p/>
+        </p:txBody>
       </p:sp>
       <p:sp>
         <p:nvSpPr>
@@ -10779,6 +11715,10 @@
             <a:srgbClr val="00B4A6"/>
           </a:solidFill>
         </p:spPr>
+        <p:txBody>
+          <a:bodyPr/>
+          <a:p/>
+        </p:txBody>
       </p:sp>
       <p:sp>
         <p:nvSpPr>
@@ -10887,6 +11827,10 @@
             </a:outerShdw>
           </a:effectLst>
         </p:spPr>
+        <p:txBody>
+          <a:bodyPr/>
+          <a:p/>
+        </p:txBody>
       </p:sp>
       <p:sp>
         <p:nvSpPr>
@@ -10906,6 +11850,10 @@
             <a:srgbClr val="00B4A6"/>
           </a:solidFill>
         </p:spPr>
+        <p:txBody>
+          <a:bodyPr/>
+          <a:p/>
+        </p:txBody>
       </p:sp>
       <p:sp>
         <p:nvSpPr>
@@ -11014,6 +11962,10 @@
             </a:outerShdw>
           </a:effectLst>
         </p:spPr>
+        <p:txBody>
+          <a:bodyPr/>
+          <a:p/>
+        </p:txBody>
       </p:sp>
       <p:sp>
         <p:nvSpPr>
@@ -11033,6 +11985,10 @@
             <a:srgbClr val="00B4A6"/>
           </a:solidFill>
         </p:spPr>
+        <p:txBody>
+          <a:bodyPr/>
+          <a:p/>
+        </p:txBody>
       </p:sp>
       <p:sp>
         <p:nvSpPr>
@@ -11180,7 +12136,7 @@
                 <a:ea typeface="Calibri" pitchFamily="34" charset="-122"/>
                 <a:cs typeface="Calibri" pitchFamily="34" charset="-120"/>
               </a:rPr>
-              <a:t>5 / 13</a:t>
+              <a:t>5 / 14</a:t>
             </a:r>
             <a:endParaRPr lang="en-US" sz="900" dirty="0"/>
           </a:p>
@@ -11237,6 +12193,10 @@
             <a:srgbClr val="0F2A4A"/>
           </a:solidFill>
         </p:spPr>
+        <p:txBody>
+          <a:bodyPr/>
+          <a:p/>
+        </p:txBody>
       </p:sp>
       <p:sp>
         <p:nvSpPr>
@@ -11395,6 +12355,10 @@
             <a:srgbClr val="00B4A6"/>
           </a:solidFill>
         </p:spPr>
+        <p:txBody>
+          <a:bodyPr/>
+          <a:p/>
+        </p:txBody>
       </p:sp>
       <p:sp>
         <p:nvSpPr>
@@ -11490,6 +12454,10 @@
             <a:srgbClr val="00B4A6"/>
           </a:solidFill>
         </p:spPr>
+        <p:txBody>
+          <a:bodyPr/>
+          <a:p/>
+        </p:txBody>
       </p:sp>
       <p:sp>
         <p:nvSpPr>
@@ -11585,6 +12553,10 @@
             <a:srgbClr val="00B4A6"/>
           </a:solidFill>
         </p:spPr>
+        <p:txBody>
+          <a:bodyPr/>
+          <a:p/>
+        </p:txBody>
       </p:sp>
       <p:sp>
         <p:nvSpPr>
@@ -11680,6 +12652,10 @@
             <a:srgbClr val="00B4A6"/>
           </a:solidFill>
         </p:spPr>
+        <p:txBody>
+          <a:bodyPr/>
+          <a:p/>
+        </p:txBody>
       </p:sp>
       <p:sp>
         <p:nvSpPr>
@@ -11775,6 +12751,10 @@
             <a:srgbClr val="00B4A6"/>
           </a:solidFill>
         </p:spPr>
+        <p:txBody>
+          <a:bodyPr/>
+          <a:p/>
+        </p:txBody>
       </p:sp>
       <p:sp>
         <p:nvSpPr>
@@ -11870,6 +12850,10 @@
             <a:srgbClr val="00B4A6"/>
           </a:solidFill>
         </p:spPr>
+        <p:txBody>
+          <a:bodyPr/>
+          <a:p/>
+        </p:txBody>
       </p:sp>
       <p:sp>
         <p:nvSpPr>
@@ -12017,7 +13001,7 @@
                 <a:ea typeface="Calibri" pitchFamily="34" charset="-122"/>
                 <a:cs typeface="Calibri" pitchFamily="34" charset="-120"/>
               </a:rPr>
-              <a:t>6 / 13</a:t>
+              <a:t>6 / 14</a:t>
             </a:r>
             <a:endParaRPr lang="en-US" sz="900" dirty="0"/>
           </a:p>
@@ -12074,6 +13058,10 @@
             <a:srgbClr val="0F2A4A"/>
           </a:solidFill>
         </p:spPr>
+        <p:txBody>
+          <a:bodyPr/>
+          <a:p/>
+        </p:txBody>
       </p:sp>
       <p:sp>
         <p:nvSpPr>
@@ -12274,6 +13262,10 @@
             <a:prstDash val="solid"/>
           </a:ln>
         </p:spPr>
+        <p:txBody>
+          <a:bodyPr/>
+          <a:p/>
+        </p:txBody>
       </p:sp>
       <p:sp>
         <p:nvSpPr>
@@ -12421,7 +13413,7 @@
                 <a:ea typeface="Calibri" pitchFamily="34" charset="-122"/>
                 <a:cs typeface="Calibri" pitchFamily="34" charset="-120"/>
               </a:rPr>
-              <a:t>7 / 13</a:t>
+              <a:t>7 / 14</a:t>
             </a:r>
             <a:endParaRPr lang="en-US" sz="900" dirty="0"/>
           </a:p>
@@ -12478,6 +13470,10 @@
             <a:srgbClr val="0F2A4A"/>
           </a:solidFill>
         </p:spPr>
+        <p:txBody>
+          <a:bodyPr/>
+          <a:p/>
+        </p:txBody>
       </p:sp>
       <p:sp>
         <p:nvSpPr>
@@ -12712,6 +13708,10 @@
             </a:outerShdw>
           </a:effectLst>
         </p:spPr>
+        <p:txBody>
+          <a:bodyPr/>
+          <a:p/>
+        </p:txBody>
       </p:sp>
       <p:sp>
         <p:nvSpPr>
@@ -12769,6 +13769,10 @@
             <a:srgbClr val="00B4A6"/>
           </a:solidFill>
         </p:spPr>
+        <p:txBody>
+          <a:bodyPr/>
+          <a:p/>
+        </p:txBody>
       </p:sp>
       <p:sp>
         <p:nvSpPr>
@@ -12864,6 +13868,10 @@
             <a:srgbClr val="00B4A6"/>
           </a:solidFill>
         </p:spPr>
+        <p:txBody>
+          <a:bodyPr/>
+          <a:p/>
+        </p:txBody>
       </p:sp>
       <p:sp>
         <p:nvSpPr>
@@ -12959,6 +13967,10 @@
             <a:srgbClr val="00B4A6"/>
           </a:solidFill>
         </p:spPr>
+        <p:txBody>
+          <a:bodyPr/>
+          <a:p/>
+        </p:txBody>
       </p:sp>
       <p:sp>
         <p:nvSpPr>
@@ -13106,7 +14118,7 @@
                 <a:ea typeface="Calibri" pitchFamily="34" charset="-122"/>
                 <a:cs typeface="Calibri" pitchFamily="34" charset="-120"/>
               </a:rPr>
-              <a:t>8 / 13</a:t>
+              <a:t>8 / 14</a:t>
             </a:r>
             <a:endParaRPr lang="en-US" sz="900" dirty="0"/>
           </a:p>
@@ -13163,6 +14175,10 @@
             <a:srgbClr val="0F2A4A"/>
           </a:solidFill>
         </p:spPr>
+        <p:txBody>
+          <a:bodyPr/>
+          <a:p/>
+        </p:txBody>
       </p:sp>
       <p:sp>
         <p:nvSpPr>
@@ -13346,6 +14362,10 @@
             <a:srgbClr val="0F2A4A"/>
           </a:solidFill>
         </p:spPr>
+        <p:txBody>
+          <a:bodyPr/>
+          <a:p/>
+        </p:txBody>
       </p:sp>
       <p:sp>
         <p:nvSpPr>
@@ -13602,7 +14622,7 @@
                 <a:ea typeface="Calibri" pitchFamily="34" charset="-122"/>
                 <a:cs typeface="Calibri" pitchFamily="34" charset="-120"/>
               </a:rPr>
-              <a:t>9 / 13</a:t>
+              <a:t>9 / 14</a:t>
             </a:r>
             <a:endParaRPr lang="en-US" sz="900" dirty="0"/>
           </a:p>
